--- a/OUTPUT/20260402/AI駆動開発_実証実験_成果報告_ClaudeCodeの成熟度レベル比較_2026Q1.pptx
+++ b/OUTPUT/20260402/AI駆動開発_実証実験_成果報告_ClaudeCodeの成熟度レベル比較_2026Q1.pptx
@@ -14,9 +14,14 @@
     <p:sldId id="269" r:id="rId8"/>
     <p:sldId id="293" r:id="rId9"/>
     <p:sldId id="271" r:id="rId10"/>
-    <p:sldId id="294" r:id="rId11"/>
-    <p:sldId id="295" r:id="rId12"/>
-    <p:sldId id="289" r:id="rId13"/>
+    <p:sldId id="295" r:id="rId11"/>
+    <p:sldId id="297" r:id="rId12"/>
+    <p:sldId id="298" r:id="rId13"/>
+    <p:sldId id="299" r:id="rId14"/>
+    <p:sldId id="300" r:id="rId15"/>
+    <p:sldId id="301" r:id="rId16"/>
+    <p:sldId id="302" r:id="rId17"/>
+    <p:sldId id="289" r:id="rId18"/>
   </p:sldIdLst>
   <p:sldSz cx="12192000" cy="6858000"/>
   <p:notesSz cx="6858000" cy="9144000"/>
@@ -313,7 +318,7 @@
           <a:p>
             <a:fld id="{5BCAD085-E8A6-8845-BD4E-CB4CCA059FC4}" type="datetimeFigureOut">
               <a:rPr lang="en-US" smtClean="0"/>
-              <a:t>4/8/2026</a:t>
+              <a:t>4/15/2026</a:t>
             </a:fld>
             <a:endParaRPr lang="en-US"/>
           </a:p>
@@ -481,7 +486,7 @@
           <a:p>
             <a:fld id="{5BCAD085-E8A6-8845-BD4E-CB4CCA059FC4}" type="datetimeFigureOut">
               <a:rPr lang="en-US" smtClean="0"/>
-              <a:t>4/8/2026</a:t>
+              <a:t>4/15/2026</a:t>
             </a:fld>
             <a:endParaRPr lang="en-US"/>
           </a:p>
@@ -659,7 +664,7 @@
           <a:p>
             <a:fld id="{5BCAD085-E8A6-8845-BD4E-CB4CCA059FC4}" type="datetimeFigureOut">
               <a:rPr lang="en-US" smtClean="0"/>
-              <a:t>4/8/2026</a:t>
+              <a:t>4/15/2026</a:t>
             </a:fld>
             <a:endParaRPr lang="en-US"/>
           </a:p>
@@ -827,7 +832,7 @@
           <a:p>
             <a:fld id="{5BCAD085-E8A6-8845-BD4E-CB4CCA059FC4}" type="datetimeFigureOut">
               <a:rPr lang="en-US" smtClean="0"/>
-              <a:t>4/8/2026</a:t>
+              <a:t>4/15/2026</a:t>
             </a:fld>
             <a:endParaRPr lang="en-US"/>
           </a:p>
@@ -1072,7 +1077,7 @@
           <a:p>
             <a:fld id="{5BCAD085-E8A6-8845-BD4E-CB4CCA059FC4}" type="datetimeFigureOut">
               <a:rPr lang="en-US" smtClean="0"/>
-              <a:t>4/8/2026</a:t>
+              <a:t>4/15/2026</a:t>
             </a:fld>
             <a:endParaRPr lang="en-US"/>
           </a:p>
@@ -1357,7 +1362,7 @@
           <a:p>
             <a:fld id="{5BCAD085-E8A6-8845-BD4E-CB4CCA059FC4}" type="datetimeFigureOut">
               <a:rPr lang="en-US" smtClean="0"/>
-              <a:t>4/8/2026</a:t>
+              <a:t>4/15/2026</a:t>
             </a:fld>
             <a:endParaRPr lang="en-US"/>
           </a:p>
@@ -1776,7 +1781,7 @@
           <a:p>
             <a:fld id="{5BCAD085-E8A6-8845-BD4E-CB4CCA059FC4}" type="datetimeFigureOut">
               <a:rPr lang="en-US" smtClean="0"/>
-              <a:t>4/8/2026</a:t>
+              <a:t>4/15/2026</a:t>
             </a:fld>
             <a:endParaRPr lang="en-US"/>
           </a:p>
@@ -1893,7 +1898,7 @@
           <a:p>
             <a:fld id="{5BCAD085-E8A6-8845-BD4E-CB4CCA059FC4}" type="datetimeFigureOut">
               <a:rPr lang="en-US" smtClean="0"/>
-              <a:t>4/8/2026</a:t>
+              <a:t>4/15/2026</a:t>
             </a:fld>
             <a:endParaRPr lang="en-US"/>
           </a:p>
@@ -1988,7 +1993,7 @@
           <a:p>
             <a:fld id="{5BCAD085-E8A6-8845-BD4E-CB4CCA059FC4}" type="datetimeFigureOut">
               <a:rPr lang="en-US" smtClean="0"/>
-              <a:t>4/8/2026</a:t>
+              <a:t>4/15/2026</a:t>
             </a:fld>
             <a:endParaRPr lang="en-US"/>
           </a:p>
@@ -2263,7 +2268,7 @@
           <a:p>
             <a:fld id="{5BCAD085-E8A6-8845-BD4E-CB4CCA059FC4}" type="datetimeFigureOut">
               <a:rPr lang="en-US" smtClean="0"/>
-              <a:t>4/8/2026</a:t>
+              <a:t>4/15/2026</a:t>
             </a:fld>
             <a:endParaRPr lang="en-US"/>
           </a:p>
@@ -2515,7 +2520,7 @@
           <a:p>
             <a:fld id="{5BCAD085-E8A6-8845-BD4E-CB4CCA059FC4}" type="datetimeFigureOut">
               <a:rPr lang="en-US" smtClean="0"/>
-              <a:t>4/8/2026</a:t>
+              <a:t>4/15/2026</a:t>
             </a:fld>
             <a:endParaRPr lang="en-US"/>
           </a:p>
@@ -2726,7 +2731,7 @@
           <a:p>
             <a:fld id="{5BCAD085-E8A6-8845-BD4E-CB4CCA059FC4}" type="datetimeFigureOut">
               <a:rPr lang="en-US" smtClean="0"/>
-              <a:t>4/8/2026</a:t>
+              <a:t>4/15/2026</a:t>
             </a:fld>
             <a:endParaRPr lang="en-US"/>
           </a:p>
@@ -3261,7 +3266,7 @@
             </a:r>
             <a:r>
               <a:rPr lang="en-US" dirty="0"/>
-              <a:t>8</a:t>
+              <a:t>15</a:t>
             </a:r>
             <a:r>
               <a:rPr dirty="0"/>
@@ -3384,7 +3389,7 @@
             </a:pPr>
             <a:r>
               <a:rPr lang="en-US" dirty="0"/>
-              <a:t>5</a:t>
+              <a:t>6</a:t>
             </a:r>
             <a:r>
               <a:rPr dirty="0"/>
@@ -3392,7 +3397,7 @@
             </a:r>
             <a:r>
               <a:rPr dirty="0" err="1"/>
-              <a:t>他プロジェクトへの展開方法</a:t>
+              <a:t>まとめ</a:t>
             </a:r>
             <a:endParaRPr dirty="0"/>
           </a:p>
@@ -3400,56 +3405,20 @@
       </p:sp>
       <p:sp>
         <p:nvSpPr>
-          <p:cNvPr id="4" name="TextBox 3"/>
-          <p:cNvSpPr txBox="1"/>
-          <p:nvPr/>
-        </p:nvSpPr>
-        <p:spPr>
-          <a:xfrm>
-            <a:off x="731520" y="594360"/>
-            <a:ext cx="10058400" cy="365760"/>
-          </a:xfrm>
-          <a:prstGeom prst="rect">
-            <a:avLst/>
-          </a:prstGeom>
-          <a:noFill/>
-        </p:spPr>
-        <p:txBody>
-          <a:bodyPr wrap="square">
-            <a:spAutoFit/>
-          </a:bodyPr>
-          <a:lstStyle/>
-          <a:p>
-            <a:pPr algn="l">
-              <a:defRPr sz="1600" b="0">
-                <a:solidFill>
-                  <a:srgbClr val="BBCCDD"/>
-                </a:solidFill>
-                <a:latin typeface="Yu Gothic"/>
-              </a:defRPr>
-            </a:pPr>
-            <a:r>
-              <a:t>テンプレートリポジトリによる段階的導入</a:t>
-            </a:r>
-          </a:p>
-        </p:txBody>
-      </p:sp>
-      <p:sp>
-        <p:nvSpPr>
-          <p:cNvPr id="5" name="Rectangle 4"/>
+          <p:cNvPr id="4" name="Rectangle 3"/>
           <p:cNvSpPr/>
           <p:nvPr/>
         </p:nvSpPr>
         <p:spPr>
           <a:xfrm>
-            <a:off x="457200" y="1371600"/>
-            <a:ext cx="2560320" cy="2011680"/>
+            <a:off x="457200" y="1188720"/>
+            <a:ext cx="3474720" cy="2286000"/>
           </a:xfrm>
           <a:prstGeom prst="rect">
             <a:avLst/>
           </a:prstGeom>
           <a:solidFill>
-            <a:srgbClr val="99BBDD"/>
+            <a:srgbClr val="FFFFFF"/>
           </a:solidFill>
           <a:ln>
             <a:noFill/>
@@ -3480,426 +3449,14 @@
       </p:sp>
       <p:sp>
         <p:nvSpPr>
-          <p:cNvPr id="6" name="TextBox 5"/>
-          <p:cNvSpPr txBox="1"/>
-          <p:nvPr/>
-        </p:nvSpPr>
-        <p:spPr>
-          <a:xfrm>
-            <a:off x="457200" y="1554480"/>
-            <a:ext cx="2560320" cy="365760"/>
-          </a:xfrm>
-          <a:prstGeom prst="rect">
-            <a:avLst/>
-          </a:prstGeom>
-          <a:noFill/>
-        </p:spPr>
-        <p:txBody>
-          <a:bodyPr wrap="square">
-            <a:spAutoFit/>
-          </a:bodyPr>
-          <a:lstStyle/>
-          <a:p>
-            <a:pPr algn="ctr">
-              <a:defRPr sz="1800" b="1">
-                <a:solidFill>
-                  <a:srgbClr val="FFFFFF"/>
-                </a:solidFill>
-                <a:latin typeface="Yu Gothic"/>
-              </a:defRPr>
-            </a:pPr>
-            <a:r>
-              <a:t>Week 1</a:t>
-            </a:r>
-          </a:p>
-        </p:txBody>
-      </p:sp>
-      <p:sp>
-        <p:nvSpPr>
-          <p:cNvPr id="7" name="TextBox 6"/>
-          <p:cNvSpPr txBox="1"/>
-          <p:nvPr/>
-        </p:nvSpPr>
-        <p:spPr>
-          <a:xfrm>
-            <a:off x="457200" y="1965960"/>
-            <a:ext cx="2560320" cy="365760"/>
-          </a:xfrm>
-          <a:prstGeom prst="rect">
-            <a:avLst/>
-          </a:prstGeom>
-          <a:noFill/>
-        </p:spPr>
-        <p:txBody>
-          <a:bodyPr wrap="square">
-            <a:spAutoFit/>
-          </a:bodyPr>
-          <a:lstStyle/>
-          <a:p>
-            <a:pPr algn="ctr">
-              <a:defRPr sz="2400" b="1">
-                <a:solidFill>
-                  <a:srgbClr val="FFFFFF"/>
-                </a:solidFill>
-                <a:latin typeface="Yu Gothic"/>
-              </a:defRPr>
-            </a:pPr>
-            <a:r>
-              <a:t>Level 2</a:t>
-            </a:r>
-          </a:p>
-        </p:txBody>
-      </p:sp>
-      <p:sp>
-        <p:nvSpPr>
-          <p:cNvPr id="8" name="TextBox 7"/>
-          <p:cNvSpPr txBox="1"/>
-          <p:nvPr/>
-        </p:nvSpPr>
-        <p:spPr>
-          <a:xfrm>
-            <a:off x="457200" y="2468880"/>
-            <a:ext cx="2560320" cy="731520"/>
-          </a:xfrm>
-          <a:prstGeom prst="rect">
-            <a:avLst/>
-          </a:prstGeom>
-          <a:noFill/>
-        </p:spPr>
-        <p:txBody>
-          <a:bodyPr wrap="square">
-            <a:spAutoFit/>
-          </a:bodyPr>
-          <a:lstStyle/>
-          <a:p>
-            <a:pPr algn="ctr">
-              <a:defRPr sz="1600" b="0">
-                <a:solidFill>
-                  <a:srgbClr val="FFFFFF"/>
-                </a:solidFill>
-                <a:latin typeface="Yu Gothic"/>
-              </a:defRPr>
-            </a:pPr>
-            <a:r>
-              <a:t>CLAUDE.md を配置</a:t>
-            </a:r>
-          </a:p>
-        </p:txBody>
-      </p:sp>
-      <p:sp>
-        <p:nvSpPr>
-          <p:cNvPr id="9" name="Rectangle 8"/>
+          <p:cNvPr id="5" name="Rectangle 4"/>
           <p:cNvSpPr/>
           <p:nvPr/>
         </p:nvSpPr>
         <p:spPr>
           <a:xfrm>
-            <a:off x="3291840" y="1371600"/>
-            <a:ext cx="2560320" cy="2011680"/>
-          </a:xfrm>
-          <a:prstGeom prst="rect">
-            <a:avLst/>
-          </a:prstGeom>
-          <a:solidFill>
-            <a:srgbClr val="6699CC"/>
-          </a:solidFill>
-          <a:ln>
-            <a:noFill/>
-          </a:ln>
-        </p:spPr>
-        <p:style>
-          <a:lnRef idx="1">
-            <a:schemeClr val="accent1"/>
-          </a:lnRef>
-          <a:fillRef idx="3">
-            <a:schemeClr val="accent1"/>
-          </a:fillRef>
-          <a:effectRef idx="2">
-            <a:schemeClr val="accent1"/>
-          </a:effectRef>
-          <a:fontRef idx="minor">
-            <a:schemeClr val="lt1"/>
-          </a:fontRef>
-        </p:style>
-        <p:txBody>
-          <a:bodyPr rtlCol="0" anchor="ctr"/>
-          <a:lstStyle/>
-          <a:p>
-            <a:pPr algn="ctr"/>
-            <a:endParaRPr/>
-          </a:p>
-        </p:txBody>
-      </p:sp>
-      <p:sp>
-        <p:nvSpPr>
-          <p:cNvPr id="10" name="TextBox 9"/>
-          <p:cNvSpPr txBox="1"/>
-          <p:nvPr/>
-        </p:nvSpPr>
-        <p:spPr>
-          <a:xfrm>
-            <a:off x="3291840" y="1554480"/>
-            <a:ext cx="2560320" cy="365760"/>
-          </a:xfrm>
-          <a:prstGeom prst="rect">
-            <a:avLst/>
-          </a:prstGeom>
-          <a:noFill/>
-        </p:spPr>
-        <p:txBody>
-          <a:bodyPr wrap="square">
-            <a:spAutoFit/>
-          </a:bodyPr>
-          <a:lstStyle/>
-          <a:p>
-            <a:pPr algn="ctr">
-              <a:defRPr sz="1800" b="1">
-                <a:solidFill>
-                  <a:srgbClr val="FFFFFF"/>
-                </a:solidFill>
-                <a:latin typeface="Yu Gothic"/>
-              </a:defRPr>
-            </a:pPr>
-            <a:r>
-              <a:t>Week 2</a:t>
-            </a:r>
-          </a:p>
-        </p:txBody>
-      </p:sp>
-      <p:sp>
-        <p:nvSpPr>
-          <p:cNvPr id="11" name="TextBox 10"/>
-          <p:cNvSpPr txBox="1"/>
-          <p:nvPr/>
-        </p:nvSpPr>
-        <p:spPr>
-          <a:xfrm>
-            <a:off x="3291840" y="1965960"/>
-            <a:ext cx="2560320" cy="365760"/>
-          </a:xfrm>
-          <a:prstGeom prst="rect">
-            <a:avLst/>
-          </a:prstGeom>
-          <a:noFill/>
-        </p:spPr>
-        <p:txBody>
-          <a:bodyPr wrap="square">
-            <a:spAutoFit/>
-          </a:bodyPr>
-          <a:lstStyle/>
-          <a:p>
-            <a:pPr algn="ctr">
-              <a:defRPr sz="2400" b="1">
-                <a:solidFill>
-                  <a:srgbClr val="FFFFFF"/>
-                </a:solidFill>
-                <a:latin typeface="Yu Gothic"/>
-              </a:defRPr>
-            </a:pPr>
-            <a:r>
-              <a:t>Level 3</a:t>
-            </a:r>
-          </a:p>
-        </p:txBody>
-      </p:sp>
-      <p:sp>
-        <p:nvSpPr>
-          <p:cNvPr id="12" name="TextBox 11"/>
-          <p:cNvSpPr txBox="1"/>
-          <p:nvPr/>
-        </p:nvSpPr>
-        <p:spPr>
-          <a:xfrm>
-            <a:off x="3291840" y="2468880"/>
-            <a:ext cx="2560320" cy="731520"/>
-          </a:xfrm>
-          <a:prstGeom prst="rect">
-            <a:avLst/>
-          </a:prstGeom>
-          <a:noFill/>
-        </p:spPr>
-        <p:txBody>
-          <a:bodyPr wrap="square">
-            <a:spAutoFit/>
-          </a:bodyPr>
-          <a:lstStyle/>
-          <a:p>
-            <a:pPr algn="ctr">
-              <a:defRPr sz="1600" b="0">
-                <a:solidFill>
-                  <a:srgbClr val="FFFFFF"/>
-                </a:solidFill>
-                <a:latin typeface="Yu Gothic"/>
-              </a:defRPr>
-            </a:pPr>
-            <a:r>
-              <a:t>Skills を追加</a:t>
-            </a:r>
-          </a:p>
-        </p:txBody>
-      </p:sp>
-      <p:sp>
-        <p:nvSpPr>
-          <p:cNvPr id="13" name="Rectangle 12"/>
-          <p:cNvSpPr/>
-          <p:nvPr/>
-        </p:nvSpPr>
-        <p:spPr>
-          <a:xfrm>
-            <a:off x="6126480" y="1371600"/>
-            <a:ext cx="2560320" cy="2011680"/>
-          </a:xfrm>
-          <a:prstGeom prst="rect">
-            <a:avLst/>
-          </a:prstGeom>
-          <a:solidFill>
-            <a:srgbClr val="3377BB"/>
-          </a:solidFill>
-          <a:ln>
-            <a:noFill/>
-          </a:ln>
-        </p:spPr>
-        <p:style>
-          <a:lnRef idx="1">
-            <a:schemeClr val="accent1"/>
-          </a:lnRef>
-          <a:fillRef idx="3">
-            <a:schemeClr val="accent1"/>
-          </a:fillRef>
-          <a:effectRef idx="2">
-            <a:schemeClr val="accent1"/>
-          </a:effectRef>
-          <a:fontRef idx="minor">
-            <a:schemeClr val="lt1"/>
-          </a:fontRef>
-        </p:style>
-        <p:txBody>
-          <a:bodyPr rtlCol="0" anchor="ctr"/>
-          <a:lstStyle/>
-          <a:p>
-            <a:pPr algn="ctr"/>
-            <a:endParaRPr/>
-          </a:p>
-        </p:txBody>
-      </p:sp>
-      <p:sp>
-        <p:nvSpPr>
-          <p:cNvPr id="14" name="TextBox 13"/>
-          <p:cNvSpPr txBox="1"/>
-          <p:nvPr/>
-        </p:nvSpPr>
-        <p:spPr>
-          <a:xfrm>
-            <a:off x="6126480" y="1554480"/>
-            <a:ext cx="2560320" cy="365760"/>
-          </a:xfrm>
-          <a:prstGeom prst="rect">
-            <a:avLst/>
-          </a:prstGeom>
-          <a:noFill/>
-        </p:spPr>
-        <p:txBody>
-          <a:bodyPr wrap="square">
-            <a:spAutoFit/>
-          </a:bodyPr>
-          <a:lstStyle/>
-          <a:p>
-            <a:pPr algn="ctr">
-              <a:defRPr sz="1800" b="1">
-                <a:solidFill>
-                  <a:srgbClr val="FFFFFF"/>
-                </a:solidFill>
-                <a:latin typeface="Yu Gothic"/>
-              </a:defRPr>
-            </a:pPr>
-            <a:r>
-              <a:t>Week 3</a:t>
-            </a:r>
-          </a:p>
-        </p:txBody>
-      </p:sp>
-      <p:sp>
-        <p:nvSpPr>
-          <p:cNvPr id="15" name="TextBox 14"/>
-          <p:cNvSpPr txBox="1"/>
-          <p:nvPr/>
-        </p:nvSpPr>
-        <p:spPr>
-          <a:xfrm>
-            <a:off x="6126480" y="1965960"/>
-            <a:ext cx="2560320" cy="365760"/>
-          </a:xfrm>
-          <a:prstGeom prst="rect">
-            <a:avLst/>
-          </a:prstGeom>
-          <a:noFill/>
-        </p:spPr>
-        <p:txBody>
-          <a:bodyPr wrap="square">
-            <a:spAutoFit/>
-          </a:bodyPr>
-          <a:lstStyle/>
-          <a:p>
-            <a:pPr algn="ctr">
-              <a:defRPr sz="2400" b="1">
-                <a:solidFill>
-                  <a:srgbClr val="FFFFFF"/>
-                </a:solidFill>
-                <a:latin typeface="Yu Gothic"/>
-              </a:defRPr>
-            </a:pPr>
-            <a:r>
-              <a:t>Level 4</a:t>
-            </a:r>
-          </a:p>
-        </p:txBody>
-      </p:sp>
-      <p:sp>
-        <p:nvSpPr>
-          <p:cNvPr id="16" name="TextBox 15"/>
-          <p:cNvSpPr txBox="1"/>
-          <p:nvPr/>
-        </p:nvSpPr>
-        <p:spPr>
-          <a:xfrm>
-            <a:off x="6126480" y="2468880"/>
-            <a:ext cx="2560320" cy="731520"/>
-          </a:xfrm>
-          <a:prstGeom prst="rect">
-            <a:avLst/>
-          </a:prstGeom>
-          <a:noFill/>
-        </p:spPr>
-        <p:txBody>
-          <a:bodyPr wrap="square">
-            <a:spAutoFit/>
-          </a:bodyPr>
-          <a:lstStyle/>
-          <a:p>
-            <a:pPr algn="ctr">
-              <a:defRPr sz="1600" b="0">
-                <a:solidFill>
-                  <a:srgbClr val="FFFFFF"/>
-                </a:solidFill>
-                <a:latin typeface="Yu Gothic"/>
-              </a:defRPr>
-            </a:pPr>
-            <a:r>
-              <a:t>Hooks を追加</a:t>
-            </a:r>
-          </a:p>
-        </p:txBody>
-      </p:sp>
-      <p:sp>
-        <p:nvSpPr>
-          <p:cNvPr id="17" name="Rectangle 16"/>
-          <p:cNvSpPr/>
-          <p:nvPr/>
-        </p:nvSpPr>
-        <p:spPr>
-          <a:xfrm>
-            <a:off x="8961120" y="1371600"/>
-            <a:ext cx="2560320" cy="2011680"/>
+            <a:off x="457200" y="1188720"/>
+            <a:ext cx="73152" cy="2286000"/>
           </a:xfrm>
           <a:prstGeom prst="rect">
             <a:avLst/>
@@ -3936,14 +3493,14 @@
       </p:sp>
       <p:sp>
         <p:nvSpPr>
-          <p:cNvPr id="18" name="TextBox 17"/>
+          <p:cNvPr id="6" name="TextBox 5"/>
           <p:cNvSpPr txBox="1"/>
           <p:nvPr/>
         </p:nvSpPr>
         <p:spPr>
           <a:xfrm>
-            <a:off x="8961120" y="1554480"/>
-            <a:ext cx="2560320" cy="365760"/>
+            <a:off x="685800" y="1280160"/>
+            <a:ext cx="3108960" cy="365760"/>
           </a:xfrm>
           <a:prstGeom prst="rect">
             <a:avLst/>
@@ -3956,30 +3513,30 @@
           </a:bodyPr>
           <a:lstStyle/>
           <a:p>
-            <a:pPr algn="ctr">
+            <a:pPr algn="l">
               <a:defRPr sz="1800" b="1">
                 <a:solidFill>
-                  <a:srgbClr val="FFFFFF"/>
+                  <a:srgbClr val="007ACC"/>
                 </a:solidFill>
                 <a:latin typeface="Yu Gothic"/>
               </a:defRPr>
             </a:pPr>
             <a:r>
-              <a:t>Week 4</a:t>
-            </a:r>
-          </a:p>
-        </p:txBody>
-      </p:sp>
-      <p:sp>
-        <p:nvSpPr>
-          <p:cNvPr id="19" name="TextBox 18"/>
+              <a:t>開発生産性</a:t>
+            </a:r>
+          </a:p>
+        </p:txBody>
+      </p:sp>
+      <p:sp>
+        <p:nvSpPr>
+          <p:cNvPr id="7" name="TextBox 6"/>
           <p:cNvSpPr txBox="1"/>
           <p:nvPr/>
         </p:nvSpPr>
         <p:spPr>
           <a:xfrm>
-            <a:off x="8961120" y="1965960"/>
-            <a:ext cx="2560320" cy="365760"/>
+            <a:off x="685800" y="1645920"/>
+            <a:ext cx="3108960" cy="1737360"/>
           </a:xfrm>
           <a:prstGeom prst="rect">
             <a:avLst/>
@@ -3992,174 +3549,65 @@
           </a:bodyPr>
           <a:lstStyle/>
           <a:p>
-            <a:pPr algn="ctr">
-              <a:defRPr sz="2400" b="1">
-                <a:solidFill>
-                  <a:srgbClr val="FFFFFF"/>
+            <a:pPr algn="l">
+              <a:spcAft>
+                <a:spcPts val="700"/>
+              </a:spcAft>
+              <a:defRPr sz="3600" b="1">
+                <a:solidFill>
+                  <a:srgbClr val="007ACC"/>
                 </a:solidFill>
                 <a:latin typeface="Yu Gothic"/>
               </a:defRPr>
             </a:pPr>
             <a:r>
-              <a:t>Level 5</a:t>
-            </a:r>
-          </a:p>
-        </p:txBody>
-      </p:sp>
-      <p:sp>
-        <p:nvSpPr>
-          <p:cNvPr id="20" name="TextBox 19"/>
-          <p:cNvSpPr txBox="1"/>
-          <p:nvPr/>
-        </p:nvSpPr>
-        <p:spPr>
-          <a:xfrm>
-            <a:off x="8961120" y="2468880"/>
-            <a:ext cx="2560320" cy="731520"/>
-          </a:xfrm>
-          <a:prstGeom prst="rect">
-            <a:avLst/>
-          </a:prstGeom>
-          <a:noFill/>
-        </p:spPr>
-        <p:txBody>
-          <a:bodyPr wrap="square">
-            <a:spAutoFit/>
-          </a:bodyPr>
-          <a:lstStyle/>
-          <a:p>
-            <a:pPr algn="ctr">
-              <a:defRPr sz="1600" b="0">
-                <a:solidFill>
-                  <a:srgbClr val="FFFFFF"/>
+              <a:t>6〜9倍</a:t>
+            </a:r>
+          </a:p>
+          <a:p>
+            <a:pPr algn="l">
+              <a:spcAft>
+                <a:spcPts val="700"/>
+              </a:spcAft>
+              <a:defRPr sz="1800" b="0">
+                <a:solidFill>
+                  <a:srgbClr val="333333"/>
                 </a:solidFill>
                 <a:latin typeface="Yu Gothic"/>
               </a:defRPr>
             </a:pPr>
             <a:r>
-              <a:t>Agents を追加</a:t>
-            </a:r>
-          </a:p>
-        </p:txBody>
-      </p:sp>
-      <p:sp>
-        <p:nvSpPr>
-          <p:cNvPr id="21" name="TextBox 20"/>
-          <p:cNvSpPr txBox="1"/>
-          <p:nvPr/>
-        </p:nvSpPr>
-        <p:spPr>
-          <a:xfrm>
-            <a:off x="2834640" y="2011680"/>
-            <a:ext cx="457200" cy="457200"/>
-          </a:xfrm>
-          <a:prstGeom prst="rect">
-            <a:avLst/>
-          </a:prstGeom>
-          <a:noFill/>
-        </p:spPr>
-        <p:txBody>
-          <a:bodyPr wrap="square">
-            <a:spAutoFit/>
-          </a:bodyPr>
-          <a:lstStyle/>
-          <a:p>
-            <a:pPr algn="ctr">
-              <a:defRPr sz="2800" b="1">
-                <a:solidFill>
-                  <a:srgbClr val="1B3A5C"/>
+              <a:t>の期間短縮</a:t>
+            </a:r>
+          </a:p>
+          <a:p>
+            <a:pPr algn="l">
+              <a:spcAft>
+                <a:spcPts val="700"/>
+              </a:spcAft>
+              <a:defRPr sz="1400" b="0">
+                <a:solidFill>
+                  <a:srgbClr val="666666"/>
                 </a:solidFill>
                 <a:latin typeface="Yu Gothic"/>
               </a:defRPr>
             </a:pPr>
             <a:r>
-              <a:t>→</a:t>
-            </a:r>
-          </a:p>
-        </p:txBody>
-      </p:sp>
-      <p:sp>
-        <p:nvSpPr>
-          <p:cNvPr id="22" name="TextBox 21"/>
-          <p:cNvSpPr txBox="1"/>
-          <p:nvPr/>
-        </p:nvSpPr>
-        <p:spPr>
-          <a:xfrm>
-            <a:off x="5669280" y="2011680"/>
-            <a:ext cx="457200" cy="457200"/>
-          </a:xfrm>
-          <a:prstGeom prst="rect">
-            <a:avLst/>
-          </a:prstGeom>
-          <a:noFill/>
-        </p:spPr>
-        <p:txBody>
-          <a:bodyPr wrap="square">
-            <a:spAutoFit/>
-          </a:bodyPr>
-          <a:lstStyle/>
-          <a:p>
-            <a:pPr algn="ctr">
-              <a:defRPr sz="2800" b="1">
-                <a:solidFill>
-                  <a:srgbClr val="1B3A5C"/>
-                </a:solidFill>
-                <a:latin typeface="Yu Gothic"/>
-              </a:defRPr>
-            </a:pPr>
-            <a:r>
-              <a:t>→</a:t>
-            </a:r>
-          </a:p>
-        </p:txBody>
-      </p:sp>
-      <p:sp>
-        <p:nvSpPr>
-          <p:cNvPr id="23" name="TextBox 22"/>
-          <p:cNvSpPr txBox="1"/>
-          <p:nvPr/>
-        </p:nvSpPr>
-        <p:spPr>
-          <a:xfrm>
-            <a:off x="8503920" y="2011680"/>
-            <a:ext cx="457200" cy="457200"/>
-          </a:xfrm>
-          <a:prstGeom prst="rect">
-            <a:avLst/>
-          </a:prstGeom>
-          <a:noFill/>
-        </p:spPr>
-        <p:txBody>
-          <a:bodyPr wrap="square">
-            <a:spAutoFit/>
-          </a:bodyPr>
-          <a:lstStyle/>
-          <a:p>
-            <a:pPr algn="ctr">
-              <a:defRPr sz="2800" b="1">
-                <a:solidFill>
-                  <a:srgbClr val="1B3A5C"/>
-                </a:solidFill>
-                <a:latin typeface="Yu Gothic"/>
-              </a:defRPr>
-            </a:pPr>
-            <a:r>
-              <a:t>→</a:t>
-            </a:r>
-          </a:p>
-        </p:txBody>
-      </p:sp>
-      <p:sp>
-        <p:nvSpPr>
-          <p:cNvPr id="24" name="Rectangle 23"/>
+              <a:t>コード生産速度 23〜46倍</a:t>
+            </a:r>
+          </a:p>
+        </p:txBody>
+      </p:sp>
+      <p:sp>
+        <p:nvSpPr>
+          <p:cNvPr id="8" name="Rectangle 7"/>
           <p:cNvSpPr/>
           <p:nvPr/>
         </p:nvSpPr>
         <p:spPr>
           <a:xfrm>
-            <a:off x="457200" y="3840480"/>
-            <a:ext cx="11247120" cy="2560320"/>
+            <a:off x="4297680" y="1188720"/>
+            <a:ext cx="3474720" cy="2286000"/>
           </a:xfrm>
           <a:prstGeom prst="rect">
             <a:avLst/>
@@ -4196,14 +3644,14 @@
       </p:sp>
       <p:sp>
         <p:nvSpPr>
-          <p:cNvPr id="25" name="Rectangle 24"/>
+          <p:cNvPr id="9" name="Rectangle 8"/>
           <p:cNvSpPr/>
           <p:nvPr/>
         </p:nvSpPr>
         <p:spPr>
           <a:xfrm>
-            <a:off x="457200" y="3840480"/>
-            <a:ext cx="73152" cy="2560320"/>
+            <a:off x="4297680" y="1188720"/>
+            <a:ext cx="73152" cy="2286000"/>
           </a:xfrm>
           <a:prstGeom prst="rect">
             <a:avLst/>
@@ -4240,14 +3688,14 @@
       </p:sp>
       <p:sp>
         <p:nvSpPr>
-          <p:cNvPr id="26" name="TextBox 25"/>
+          <p:cNvPr id="10" name="TextBox 9"/>
           <p:cNvSpPr txBox="1"/>
           <p:nvPr/>
         </p:nvSpPr>
         <p:spPr>
           <a:xfrm>
-            <a:off x="685800" y="3931920"/>
-            <a:ext cx="10881360" cy="365760"/>
+            <a:off x="4526280" y="1280160"/>
+            <a:ext cx="3108960" cy="365760"/>
           </a:xfrm>
           <a:prstGeom prst="rect">
             <a:avLst/>
@@ -4269,21 +3717,21 @@
               </a:defRPr>
             </a:pPr>
             <a:r>
-              <a:t>テンプレートリポジトリ（ClaudeCodeTemplate）</a:t>
-            </a:r>
-          </a:p>
-        </p:txBody>
-      </p:sp>
-      <p:sp>
-        <p:nvSpPr>
-          <p:cNvPr id="27" name="TextBox 26"/>
+              <a:t>品質向上</a:t>
+            </a:r>
+          </a:p>
+        </p:txBody>
+      </p:sp>
+      <p:sp>
+        <p:nvSpPr>
+          <p:cNvPr id="11" name="TextBox 10"/>
           <p:cNvSpPr txBox="1"/>
           <p:nvPr/>
         </p:nvSpPr>
         <p:spPr>
           <a:xfrm>
-            <a:off x="685800" y="4297680"/>
-            <a:ext cx="10881360" cy="2011680"/>
+            <a:off x="4526280" y="1645920"/>
+            <a:ext cx="3108960" cy="1737360"/>
           </a:xfrm>
           <a:prstGeom prst="rect">
             <a:avLst/>
@@ -4296,27 +3744,27 @@
           </a:bodyPr>
           <a:lstStyle/>
           <a:p>
-            <a:pPr>
+            <a:pPr algn="l">
               <a:spcAft>
-                <a:spcPts val="750"/>
+                <a:spcPts val="700"/>
               </a:spcAft>
-              <a:defRPr sz="1500" b="0">
-                <a:solidFill>
-                  <a:srgbClr val="333333"/>
+              <a:defRPr sz="3600" b="1">
+                <a:solidFill>
+                  <a:srgbClr val="00A35E"/>
                 </a:solidFill>
                 <a:latin typeface="Yu Gothic"/>
               </a:defRPr>
             </a:pPr>
             <a:r>
-              <a:t>・Level 5 構成をテンプレート化済み。プレースホルダーを置換するだけで導入可能</a:t>
-            </a:r>
-          </a:p>
-          <a:p>
-            <a:pPr>
+              <a:t>813</a:t>
+            </a:r>
+          </a:p>
+          <a:p>
+            <a:pPr algn="l">
               <a:spcAft>
-                <a:spcPts val="750"/>
+                <a:spcPts val="700"/>
               </a:spcAft>
-              <a:defRPr sz="1500" b="0">
+              <a:defRPr sz="1800" b="0">
                 <a:solidFill>
                   <a:srgbClr val="333333"/>
                 </a:solidFill>
@@ -4324,39 +3772,457 @@
               </a:defRPr>
             </a:pPr>
             <a:r>
-              <a:t>・プレースホルダー: {{PROJECT_NAME}}, {{TECH_STACK}}, {{TEST_COMMAND}}, {{BUILD_COMMAND}} 等</a:t>
-            </a:r>
-          </a:p>
-          <a:p>
-            <a:pPr>
+              <a:t>テストケース自動生成</a:t>
+            </a:r>
+          </a:p>
+          <a:p>
+            <a:pPr algn="l">
               <a:spcAft>
-                <a:spcPts val="750"/>
+                <a:spcPts val="700"/>
               </a:spcAft>
-              <a:defRPr sz="1500" b="0">
-                <a:solidFill>
-                  <a:srgbClr val="333333"/>
+              <a:defRPr sz="1400" b="0">
+                <a:solidFill>
+                  <a:srgbClr val="666666"/>
                 </a:solidFill>
                 <a:latin typeface="Yu Gothic"/>
               </a:defRPr>
             </a:pPr>
             <a:r>
-              <a:t>・一気にLevel 5を目指さない。プロジェクトの課題が見えてから段階的に追加する</a:t>
-            </a:r>
-          </a:p>
-          <a:p>
-            <a:pPr>
-              <a:spcAft>
-                <a:spcPts val="750"/>
-              </a:spcAft>
-              <a:defRPr sz="1500" b="0">
-                <a:solidFill>
-                  <a:srgbClr val="333333"/>
+              <a:t>テスト密度 6倍以上</a:t>
+            </a:r>
+          </a:p>
+        </p:txBody>
+      </p:sp>
+      <p:sp>
+        <p:nvSpPr>
+          <p:cNvPr id="12" name="Rectangle 11"/>
+          <p:cNvSpPr/>
+          <p:nvPr/>
+        </p:nvSpPr>
+        <p:spPr>
+          <a:xfrm>
+            <a:off x="8138160" y="1188720"/>
+            <a:ext cx="3566160" cy="2286000"/>
+          </a:xfrm>
+          <a:prstGeom prst="rect">
+            <a:avLst/>
+          </a:prstGeom>
+          <a:solidFill>
+            <a:srgbClr val="FFFFFF"/>
+          </a:solidFill>
+          <a:ln>
+            <a:noFill/>
+          </a:ln>
+        </p:spPr>
+        <p:style>
+          <a:lnRef idx="1">
+            <a:schemeClr val="accent1"/>
+          </a:lnRef>
+          <a:fillRef idx="3">
+            <a:schemeClr val="accent1"/>
+          </a:fillRef>
+          <a:effectRef idx="2">
+            <a:schemeClr val="accent1"/>
+          </a:effectRef>
+          <a:fontRef idx="minor">
+            <a:schemeClr val="lt1"/>
+          </a:fontRef>
+        </p:style>
+        <p:txBody>
+          <a:bodyPr rtlCol="0" anchor="ctr"/>
+          <a:lstStyle/>
+          <a:p>
+            <a:pPr algn="ctr"/>
+            <a:endParaRPr/>
+          </a:p>
+        </p:txBody>
+      </p:sp>
+      <p:sp>
+        <p:nvSpPr>
+          <p:cNvPr id="13" name="Rectangle 12"/>
+          <p:cNvSpPr/>
+          <p:nvPr/>
+        </p:nvSpPr>
+        <p:spPr>
+          <a:xfrm>
+            <a:off x="8138160" y="1188720"/>
+            <a:ext cx="73152" cy="2286000"/>
+          </a:xfrm>
+          <a:prstGeom prst="rect">
+            <a:avLst/>
+          </a:prstGeom>
+          <a:solidFill>
+            <a:srgbClr val="E86C00"/>
+          </a:solidFill>
+          <a:ln>
+            <a:noFill/>
+          </a:ln>
+        </p:spPr>
+        <p:style>
+          <a:lnRef idx="1">
+            <a:schemeClr val="accent1"/>
+          </a:lnRef>
+          <a:fillRef idx="3">
+            <a:schemeClr val="accent1"/>
+          </a:fillRef>
+          <a:effectRef idx="2">
+            <a:schemeClr val="accent1"/>
+          </a:effectRef>
+          <a:fontRef idx="minor">
+            <a:schemeClr val="lt1"/>
+          </a:fontRef>
+        </p:style>
+        <p:txBody>
+          <a:bodyPr rtlCol="0" anchor="ctr"/>
+          <a:lstStyle/>
+          <a:p>
+            <a:pPr algn="ctr"/>
+            <a:endParaRPr/>
+          </a:p>
+        </p:txBody>
+      </p:sp>
+      <p:sp>
+        <p:nvSpPr>
+          <p:cNvPr id="14" name="TextBox 13"/>
+          <p:cNvSpPr txBox="1"/>
+          <p:nvPr/>
+        </p:nvSpPr>
+        <p:spPr>
+          <a:xfrm>
+            <a:off x="8366760" y="1280160"/>
+            <a:ext cx="3200400" cy="365760"/>
+          </a:xfrm>
+          <a:prstGeom prst="rect">
+            <a:avLst/>
+          </a:prstGeom>
+          <a:noFill/>
+        </p:spPr>
+        <p:txBody>
+          <a:bodyPr wrap="square">
+            <a:spAutoFit/>
+          </a:bodyPr>
+          <a:lstStyle/>
+          <a:p>
+            <a:pPr algn="l">
+              <a:defRPr sz="1800" b="1">
+                <a:solidFill>
+                  <a:srgbClr val="E86C00"/>
                 </a:solidFill>
                 <a:latin typeface="Yu Gothic"/>
               </a:defRPr>
             </a:pPr>
             <a:r>
-              <a:t>・導入: git clone → setup.sh 実行 → 生成ファイルをプロジェクトに配置</a:t>
+              <a:t>コスト最適化</a:t>
+            </a:r>
+          </a:p>
+        </p:txBody>
+      </p:sp>
+      <p:sp>
+        <p:nvSpPr>
+          <p:cNvPr id="15" name="TextBox 14"/>
+          <p:cNvSpPr txBox="1"/>
+          <p:nvPr/>
+        </p:nvSpPr>
+        <p:spPr>
+          <a:xfrm>
+            <a:off x="8366760" y="1645920"/>
+            <a:ext cx="3200400" cy="1737360"/>
+          </a:xfrm>
+          <a:prstGeom prst="rect">
+            <a:avLst/>
+          </a:prstGeom>
+          <a:noFill/>
+        </p:spPr>
+        <p:txBody>
+          <a:bodyPr wrap="square">
+            <a:spAutoFit/>
+          </a:bodyPr>
+          <a:lstStyle/>
+          <a:p>
+            <a:pPr algn="l">
+              <a:spcAft>
+                <a:spcPts val="700"/>
+              </a:spcAft>
+              <a:defRPr sz="3600" b="1">
+                <a:solidFill>
+                  <a:srgbClr val="E86C00"/>
+                </a:solidFill>
+                <a:latin typeface="Yu Gothic"/>
+              </a:defRPr>
+            </a:pPr>
+            <a:r>
+              <a:t>-73%</a:t>
+            </a:r>
+          </a:p>
+          <a:p>
+            <a:pPr algn="l">
+              <a:spcAft>
+                <a:spcPts val="700"/>
+              </a:spcAft>
+              <a:defRPr sz="1800" b="0">
+                <a:solidFill>
+                  <a:srgbClr val="333333"/>
+                </a:solidFill>
+                <a:latin typeface="Yu Gothic"/>
+              </a:defRPr>
+            </a:pPr>
+            <a:r>
+              <a:t>トークンコスト削減</a:t>
+            </a:r>
+          </a:p>
+          <a:p>
+            <a:pPr algn="l">
+              <a:spcAft>
+                <a:spcPts val="700"/>
+              </a:spcAft>
+              <a:defRPr sz="1400" b="0">
+                <a:solidFill>
+                  <a:srgbClr val="666666"/>
+                </a:solidFill>
+                <a:latin typeface="Yu Gothic"/>
+              </a:defRPr>
+            </a:pPr>
+            <a:r>
+              <a:t>Level 5 最適化による</a:t>
+            </a:r>
+          </a:p>
+        </p:txBody>
+      </p:sp>
+      <p:sp>
+        <p:nvSpPr>
+          <p:cNvPr id="16" name="Rectangle 15"/>
+          <p:cNvSpPr/>
+          <p:nvPr/>
+        </p:nvSpPr>
+        <p:spPr>
+          <a:xfrm>
+            <a:off x="457200" y="3749039"/>
+            <a:ext cx="11247120" cy="2743200"/>
+          </a:xfrm>
+          <a:prstGeom prst="rect">
+            <a:avLst/>
+          </a:prstGeom>
+          <a:solidFill>
+            <a:srgbClr val="FFFFFF"/>
+          </a:solidFill>
+          <a:ln>
+            <a:noFill/>
+          </a:ln>
+        </p:spPr>
+        <p:style>
+          <a:lnRef idx="1">
+            <a:schemeClr val="accent1"/>
+          </a:lnRef>
+          <a:fillRef idx="3">
+            <a:schemeClr val="accent1"/>
+          </a:fillRef>
+          <a:effectRef idx="2">
+            <a:schemeClr val="accent1"/>
+          </a:effectRef>
+          <a:fontRef idx="minor">
+            <a:schemeClr val="lt1"/>
+          </a:fontRef>
+        </p:style>
+        <p:txBody>
+          <a:bodyPr rtlCol="0" anchor="ctr"/>
+          <a:lstStyle/>
+          <a:p>
+            <a:pPr algn="ctr"/>
+            <a:endParaRPr/>
+          </a:p>
+        </p:txBody>
+      </p:sp>
+      <p:sp>
+        <p:nvSpPr>
+          <p:cNvPr id="17" name="Rectangle 16"/>
+          <p:cNvSpPr/>
+          <p:nvPr/>
+        </p:nvSpPr>
+        <p:spPr>
+          <a:xfrm>
+            <a:off x="457200" y="3749039"/>
+            <a:ext cx="73152" cy="2743200"/>
+          </a:xfrm>
+          <a:prstGeom prst="rect">
+            <a:avLst/>
+          </a:prstGeom>
+          <a:solidFill>
+            <a:srgbClr val="1B3A5C"/>
+          </a:solidFill>
+          <a:ln>
+            <a:noFill/>
+          </a:ln>
+        </p:spPr>
+        <p:style>
+          <a:lnRef idx="1">
+            <a:schemeClr val="accent1"/>
+          </a:lnRef>
+          <a:fillRef idx="3">
+            <a:schemeClr val="accent1"/>
+          </a:fillRef>
+          <a:effectRef idx="2">
+            <a:schemeClr val="accent1"/>
+          </a:effectRef>
+          <a:fontRef idx="minor">
+            <a:schemeClr val="lt1"/>
+          </a:fontRef>
+        </p:style>
+        <p:txBody>
+          <a:bodyPr rtlCol="0" anchor="ctr"/>
+          <a:lstStyle/>
+          <a:p>
+            <a:pPr algn="ctr"/>
+            <a:endParaRPr/>
+          </a:p>
+        </p:txBody>
+      </p:sp>
+      <p:sp>
+        <p:nvSpPr>
+          <p:cNvPr id="18" name="TextBox 17"/>
+          <p:cNvSpPr txBox="1"/>
+          <p:nvPr/>
+        </p:nvSpPr>
+        <p:spPr>
+          <a:xfrm>
+            <a:off x="685800" y="3840479"/>
+            <a:ext cx="10881360" cy="365760"/>
+          </a:xfrm>
+          <a:prstGeom prst="rect">
+            <a:avLst/>
+          </a:prstGeom>
+          <a:noFill/>
+        </p:spPr>
+        <p:txBody>
+          <a:bodyPr wrap="square">
+            <a:spAutoFit/>
+          </a:bodyPr>
+          <a:lstStyle/>
+          <a:p>
+            <a:pPr algn="l">
+              <a:defRPr sz="1800" b="1">
+                <a:solidFill>
+                  <a:srgbClr val="1B3A5C"/>
+                </a:solidFill>
+                <a:latin typeface="Yu Gothic"/>
+              </a:defRPr>
+            </a:pPr>
+            <a:r>
+              <a:t>結論</a:t>
+            </a:r>
+          </a:p>
+        </p:txBody>
+      </p:sp>
+      <p:sp>
+        <p:nvSpPr>
+          <p:cNvPr id="19" name="TextBox 18"/>
+          <p:cNvSpPr txBox="1"/>
+          <p:nvPr/>
+        </p:nvSpPr>
+        <p:spPr>
+          <a:xfrm>
+            <a:off x="685800" y="4206239"/>
+            <a:ext cx="10881360" cy="2194560"/>
+          </a:xfrm>
+          <a:prstGeom prst="rect">
+            <a:avLst/>
+          </a:prstGeom>
+          <a:noFill/>
+        </p:spPr>
+        <p:txBody>
+          <a:bodyPr wrap="square">
+            <a:spAutoFit/>
+          </a:bodyPr>
+          <a:lstStyle/>
+          <a:p>
+            <a:pPr algn="l">
+              <a:spcAft>
+                <a:spcPts val="700"/>
+              </a:spcAft>
+              <a:defRPr sz="1800" b="1">
+                <a:solidFill>
+                  <a:srgbClr val="1B3A5C"/>
+                </a:solidFill>
+                <a:latin typeface="Yu Gothic"/>
+              </a:defRPr>
+            </a:pPr>
+            <a:r>
+              <a:t>AI駆動開発は「スクラッチ開発」で最大の効果を発揮する</a:t>
+            </a:r>
+          </a:p>
+          <a:p>
+            <a:pPr algn="l">
+              <a:spcAft>
+                <a:spcPts val="700"/>
+              </a:spcAft>
+              <a:defRPr sz="600" b="0">
+                <a:solidFill>
+                  <a:srgbClr val="333333"/>
+                </a:solidFill>
+                <a:latin typeface="Yu Gothic"/>
+              </a:defRPr>
+            </a:pPr>
+            <a:endParaRPr/>
+          </a:p>
+          <a:p>
+            <a:pPr algn="l">
+              <a:spcAft>
+                <a:spcPts val="700"/>
+              </a:spcAft>
+              <a:defRPr sz="1500" b="0">
+                <a:solidFill>
+                  <a:srgbClr val="333333"/>
+                </a:solidFill>
+                <a:latin typeface="Yu Gothic"/>
+              </a:defRPr>
+            </a:pPr>
+            <a:r>
+              <a:t>スクラッチ開発: コード生成〜テスト〜CI/CDまで全工程をAIが一貫支援。6〜9倍の期間短縮。</a:t>
+            </a:r>
+          </a:p>
+          <a:p>
+            <a:pPr algn="l">
+              <a:spcAft>
+                <a:spcPts val="700"/>
+              </a:spcAft>
+              <a:defRPr sz="1500" b="0">
+                <a:solidFill>
+                  <a:srgbClr val="333333"/>
+                </a:solidFill>
+                <a:latin typeface="Yu Gothic"/>
+              </a:defRPr>
+            </a:pPr>
+            <a:r>
+              <a:t>ローコード/ノーコード: コード生成の恩恵は限定的だが、設計レビュー・要件定義・ドキュメント作成では有効。</a:t>
+            </a:r>
+          </a:p>
+          <a:p>
+            <a:pPr algn="l">
+              <a:spcAft>
+                <a:spcPts val="700"/>
+              </a:spcAft>
+              <a:defRPr sz="600" b="0">
+                <a:solidFill>
+                  <a:srgbClr val="333333"/>
+                </a:solidFill>
+                <a:latin typeface="Yu Gothic"/>
+              </a:defRPr>
+            </a:pPr>
+            <a:endParaRPr/>
+          </a:p>
+          <a:p>
+            <a:pPr algn="l">
+              <a:spcAft>
+                <a:spcPts val="700"/>
+              </a:spcAft>
+              <a:defRPr sz="1500" b="1">
+                <a:solidFill>
+                  <a:srgbClr val="007ACC"/>
+                </a:solidFill>
+                <a:latin typeface="Yu Gothic"/>
+              </a:defRPr>
+            </a:pPr>
+            <a:r>
+              <a:t>AIは「人間の意思決定を高速に具現化するエンジン」。ビジョン・ドメイン設計・UX判断は引き続き人間の役割。</a:t>
             </a:r>
           </a:p>
         </p:txBody>
@@ -4364,7 +4230,7 @@
     </p:spTree>
     <p:extLst>
       <p:ext uri="{BB962C8B-B14F-4D97-AF65-F5344CB8AC3E}">
-        <p14:creationId xmlns:p14="http://schemas.microsoft.com/office/powerpoint/2010/main" val="1342450386"/>
+        <p14:creationId xmlns:p14="http://schemas.microsoft.com/office/powerpoint/2010/main" val="574259836"/>
       </p:ext>
     </p:extLst>
   </p:cSld>
@@ -4377,14 +4243,6 @@
 <file path=ppt/slides/slide11.xml><?xml version="1.0" encoding="utf-8"?>
 <p:sld xmlns:a="http://schemas.openxmlformats.org/drawingml/2006/main" xmlns:r="http://schemas.openxmlformats.org/officeDocument/2006/relationships" xmlns:p="http://schemas.openxmlformats.org/presentationml/2006/main">
   <p:cSld>
-    <p:bg>
-      <p:bgPr>
-        <a:solidFill>
-          <a:srgbClr val="FFFFFF"/>
-        </a:solidFill>
-        <a:effectLst/>
-      </p:bgPr>
-    </p:bg>
     <p:spTree>
       <p:nvGrpSpPr>
         <p:cNvPr id="1" name=""/>
@@ -4401,179 +4259,193 @@
       </p:grpSpPr>
       <p:sp>
         <p:nvSpPr>
-          <p:cNvPr id="2" name="Rectangle 1"/>
-          <p:cNvSpPr/>
-          <p:nvPr/>
-        </p:nvSpPr>
-        <p:spPr>
-          <a:xfrm>
-            <a:off x="0" y="0"/>
-            <a:ext cx="12191695" cy="1005840"/>
+          <p:cNvPr id="2" name="TextBox 1"/>
+          <p:cNvSpPr txBox="1"/>
+          <p:nvPr/>
+        </p:nvSpPr>
+        <p:spPr>
+          <a:xfrm>
+            <a:off x="365760" y="137160"/>
+            <a:ext cx="2743200" cy="320040"/>
           </a:xfrm>
           <a:prstGeom prst="rect">
             <a:avLst/>
           </a:prstGeom>
           <a:solidFill>
-            <a:srgbClr val="1B3A5C"/>
+            <a:srgbClr val="2E86AB"/>
           </a:solidFill>
+          <a:ln>
+            <a:solidFill>
+              <a:srgbClr val="2E86AB"/>
+            </a:solidFill>
+          </a:ln>
+        </p:spPr>
+        <p:txBody>
+          <a:bodyPr wrap="square" anchor="ctr">
+            <a:spAutoFit/>
+          </a:bodyPr>
+          <a:lstStyle/>
+          <a:p>
+            <a:pPr algn="ctr"/>
+            <a:r>
+              <a:rPr sz="1100" b="1">
+                <a:solidFill>
+                  <a:srgbClr val="FFFFFF"/>
+                </a:solidFill>
+                <a:latin typeface="Yu Gothic UI"/>
+              </a:rPr>
+              <a:t>補 足</a:t>
+            </a:r>
+          </a:p>
+        </p:txBody>
+      </p:sp>
+      <p:sp>
+        <p:nvSpPr>
+          <p:cNvPr id="3" name="TextBox 2"/>
+          <p:cNvSpPr txBox="1"/>
+          <p:nvPr/>
+        </p:nvSpPr>
+        <p:spPr>
+          <a:xfrm>
+            <a:off x="365760" y="2560320"/>
+            <a:ext cx="11430000" cy="1097280"/>
+          </a:xfrm>
+          <a:prstGeom prst="rect">
+            <a:avLst/>
+          </a:prstGeom>
+          <a:noFill/>
           <a:ln>
             <a:noFill/>
           </a:ln>
         </p:spPr>
-        <p:style>
-          <a:lnRef idx="1">
-            <a:schemeClr val="accent1"/>
-          </a:lnRef>
-          <a:fillRef idx="3">
-            <a:schemeClr val="accent1"/>
-          </a:fillRef>
-          <a:effectRef idx="2">
-            <a:schemeClr val="accent1"/>
-          </a:effectRef>
-          <a:fontRef idx="minor">
-            <a:schemeClr val="lt1"/>
-          </a:fontRef>
-        </p:style>
-        <p:txBody>
-          <a:bodyPr rtlCol="0" anchor="ctr"/>
-          <a:lstStyle/>
-          <a:p>
-            <a:pPr algn="ctr"/>
-            <a:endParaRPr/>
-          </a:p>
-        </p:txBody>
-      </p:sp>
-      <p:sp>
-        <p:nvSpPr>
-          <p:cNvPr id="3" name="TextBox 2"/>
-          <p:cNvSpPr txBox="1"/>
-          <p:nvPr/>
-        </p:nvSpPr>
-        <p:spPr>
-          <a:xfrm>
-            <a:off x="731520" y="137160"/>
-            <a:ext cx="10058400" cy="548640"/>
-          </a:xfrm>
-          <a:prstGeom prst="rect">
-            <a:avLst/>
-          </a:prstGeom>
-          <a:noFill/>
-        </p:spPr>
-        <p:txBody>
-          <a:bodyPr wrap="square">
+        <p:txBody>
+          <a:bodyPr wrap="square" anchor="t">
             <a:spAutoFit/>
           </a:bodyPr>
           <a:lstStyle/>
           <a:p>
-            <a:pPr algn="l">
-              <a:defRPr sz="3000" b="1">
-                <a:solidFill>
-                  <a:srgbClr val="FFFFFF"/>
-                </a:solidFill>
-                <a:latin typeface="Yu Gothic"/>
-              </a:defRPr>
-            </a:pPr>
-            <a:r>
-              <a:rPr lang="en-US" dirty="0"/>
-              <a:t>6</a:t>
-            </a:r>
-            <a:r>
-              <a:rPr dirty="0"/>
-              <a:t>. </a:t>
-            </a:r>
-            <a:r>
-              <a:rPr dirty="0" err="1"/>
-              <a:t>まとめ</a:t>
-            </a:r>
-            <a:endParaRPr dirty="0"/>
-          </a:p>
-        </p:txBody>
-      </p:sp>
-      <p:sp>
-        <p:nvSpPr>
-          <p:cNvPr id="4" name="Rectangle 3"/>
-          <p:cNvSpPr/>
-          <p:nvPr/>
-        </p:nvSpPr>
-        <p:spPr>
-          <a:xfrm>
-            <a:off x="457200" y="1188720"/>
-            <a:ext cx="3474720" cy="2286000"/>
-          </a:xfrm>
-          <a:prstGeom prst="rect">
-            <a:avLst/>
-          </a:prstGeom>
-          <a:solidFill>
-            <a:srgbClr val="FFFFFF"/>
-          </a:solidFill>
+            <a:pPr algn="ctr"/>
+            <a:r>
+              <a:rPr sz="3600" b="1">
+                <a:solidFill>
+                  <a:srgbClr val="1F3A5F"/>
+                </a:solidFill>
+                <a:latin typeface="Yu Gothic UI"/>
+              </a:rPr>
+              <a:t>補足: AI駆動開発の前提知識</a:t>
+            </a:r>
+          </a:p>
+        </p:txBody>
+      </p:sp>
+      <p:sp>
+        <p:nvSpPr>
+          <p:cNvPr id="4" name="TextBox 3"/>
+          <p:cNvSpPr txBox="1"/>
+          <p:nvPr/>
+        </p:nvSpPr>
+        <p:spPr>
+          <a:xfrm>
+            <a:off x="365760" y="3749039"/>
+            <a:ext cx="11430000" cy="457200"/>
+          </a:xfrm>
+          <a:prstGeom prst="rect">
+            <a:avLst/>
+          </a:prstGeom>
+          <a:noFill/>
           <a:ln>
             <a:noFill/>
           </a:ln>
         </p:spPr>
-        <p:style>
-          <a:lnRef idx="1">
-            <a:schemeClr val="accent1"/>
-          </a:lnRef>
-          <a:fillRef idx="3">
-            <a:schemeClr val="accent1"/>
-          </a:fillRef>
-          <a:effectRef idx="2">
-            <a:schemeClr val="accent1"/>
-          </a:effectRef>
-          <a:fontRef idx="minor">
-            <a:schemeClr val="lt1"/>
-          </a:fontRef>
-        </p:style>
-        <p:txBody>
-          <a:bodyPr rtlCol="0" anchor="ctr"/>
+        <p:txBody>
+          <a:bodyPr wrap="square" anchor="t">
+            <a:spAutoFit/>
+          </a:bodyPr>
           <a:lstStyle/>
           <a:p>
             <a:pPr algn="ctr"/>
-            <a:endParaRPr/>
-          </a:p>
-        </p:txBody>
-      </p:sp>
-      <p:sp>
-        <p:nvSpPr>
-          <p:cNvPr id="5" name="Rectangle 4"/>
-          <p:cNvSpPr/>
-          <p:nvPr/>
-        </p:nvSpPr>
-        <p:spPr>
-          <a:xfrm>
-            <a:off x="457200" y="1188720"/>
-            <a:ext cx="73152" cy="2286000"/>
-          </a:xfrm>
-          <a:prstGeom prst="rect">
-            <a:avLst/>
-          </a:prstGeom>
-          <a:solidFill>
-            <a:srgbClr val="007ACC"/>
-          </a:solidFill>
+            <a:r>
+              <a:rPr sz="1600" b="0">
+                <a:solidFill>
+                  <a:srgbClr val="6C757D"/>
+                </a:solidFill>
+                <a:latin typeface="Yu Gothic UI"/>
+              </a:rPr>
+              <a:t>〜 AIエージェント・他ツール比較・「成熟度レベル」の位置づけ 〜</a:t>
+            </a:r>
+          </a:p>
+        </p:txBody>
+      </p:sp>
+      <p:sp>
+        <p:nvSpPr>
+          <p:cNvPr id="5" name="TextBox 4"/>
+          <p:cNvSpPr txBox="1"/>
+          <p:nvPr/>
+        </p:nvSpPr>
+        <p:spPr>
+          <a:xfrm>
+            <a:off x="365760" y="4572000"/>
+            <a:ext cx="11430000" cy="1645920"/>
+          </a:xfrm>
+          <a:prstGeom prst="rect">
+            <a:avLst/>
+          </a:prstGeom>
+          <a:noFill/>
           <a:ln>
             <a:noFill/>
           </a:ln>
         </p:spPr>
-        <p:style>
-          <a:lnRef idx="1">
-            <a:schemeClr val="accent1"/>
-          </a:lnRef>
-          <a:fillRef idx="3">
-            <a:schemeClr val="accent1"/>
-          </a:fillRef>
-          <a:effectRef idx="2">
-            <a:schemeClr val="accent1"/>
-          </a:effectRef>
-          <a:fontRef idx="minor">
-            <a:schemeClr val="lt1"/>
-          </a:fontRef>
-        </p:style>
-        <p:txBody>
-          <a:bodyPr rtlCol="0" anchor="ctr"/>
+        <p:txBody>
+          <a:bodyPr wrap="square" anchor="t">
+            <a:spAutoFit/>
+          </a:bodyPr>
           <a:lstStyle/>
           <a:p>
             <a:pPr algn="ctr"/>
-            <a:endParaRPr/>
+            <a:r>
+              <a:rPr sz="1300" b="0">
+                <a:solidFill>
+                  <a:srgbClr val="212529"/>
+                </a:solidFill>
+                <a:latin typeface="Yu Gothic UI"/>
+              </a:rPr>
+              <a:t>本資料のここから先は、AI駆動開発をこれから学ぶ方向けの前提知識です。</a:t>
+            </a:r>
+          </a:p>
+          <a:p>
+            <a:pPr algn="ctr"/>
+            <a:r>
+              <a:rPr sz="1300" b="0">
+                <a:solidFill>
+                  <a:srgbClr val="212529"/>
+                </a:solidFill>
+                <a:latin typeface="Yu Gothic UI"/>
+              </a:rPr>
+              <a:t>・AIエージェントとは何か (従来のChatGPTとの違い)</a:t>
+            </a:r>
+          </a:p>
+          <a:p>
+            <a:pPr algn="ctr"/>
+            <a:r>
+              <a:rPr sz="1300" b="0">
+                <a:solidFill>
+                  <a:srgbClr val="212529"/>
+                </a:solidFill>
+                <a:latin typeface="Yu Gothic UI"/>
+              </a:rPr>
+              <a:t>・Claude Code 以外の主要AIコーディングエージェント</a:t>
+            </a:r>
+          </a:p>
+          <a:p>
+            <a:pPr algn="ctr"/>
+            <a:r>
+              <a:rPr sz="1300" b="0">
+                <a:solidFill>
+                  <a:srgbClr val="212529"/>
+                </a:solidFill>
+                <a:latin typeface="Yu Gothic UI"/>
+              </a:rPr>
+              <a:t>・本資料で用いた「成熟度レベル Level1-5」の業界的な位置づけ</a:t>
+            </a:r>
           </a:p>
         </p:txBody>
       </p:sp>
@@ -4585,740 +4457,37 @@
         </p:nvSpPr>
         <p:spPr>
           <a:xfrm>
-            <a:off x="685800" y="1280160"/>
-            <a:ext cx="3108960" cy="365760"/>
+            <a:off x="365760" y="6400800"/>
+            <a:ext cx="11430000" cy="274320"/>
           </a:xfrm>
           <a:prstGeom prst="rect">
             <a:avLst/>
           </a:prstGeom>
           <a:noFill/>
-        </p:spPr>
-        <p:txBody>
-          <a:bodyPr wrap="square">
-            <a:spAutoFit/>
-          </a:bodyPr>
-          <a:lstStyle/>
-          <a:p>
-            <a:pPr algn="l">
-              <a:defRPr sz="1800" b="1">
-                <a:solidFill>
-                  <a:srgbClr val="007ACC"/>
-                </a:solidFill>
-                <a:latin typeface="Yu Gothic"/>
-              </a:defRPr>
-            </a:pPr>
-            <a:r>
-              <a:t>開発生産性</a:t>
-            </a:r>
-          </a:p>
-        </p:txBody>
-      </p:sp>
-      <p:sp>
-        <p:nvSpPr>
-          <p:cNvPr id="7" name="TextBox 6"/>
-          <p:cNvSpPr txBox="1"/>
-          <p:nvPr/>
-        </p:nvSpPr>
-        <p:spPr>
-          <a:xfrm>
-            <a:off x="685800" y="1645920"/>
-            <a:ext cx="3108960" cy="1737360"/>
-          </a:xfrm>
-          <a:prstGeom prst="rect">
-            <a:avLst/>
-          </a:prstGeom>
-          <a:noFill/>
-        </p:spPr>
-        <p:txBody>
-          <a:bodyPr wrap="square">
-            <a:spAutoFit/>
-          </a:bodyPr>
-          <a:lstStyle/>
-          <a:p>
-            <a:pPr algn="l">
-              <a:spcAft>
-                <a:spcPts val="700"/>
-              </a:spcAft>
-              <a:defRPr sz="3600" b="1">
-                <a:solidFill>
-                  <a:srgbClr val="007ACC"/>
-                </a:solidFill>
-                <a:latin typeface="Yu Gothic"/>
-              </a:defRPr>
-            </a:pPr>
-            <a:r>
-              <a:t>6〜9倍</a:t>
-            </a:r>
-          </a:p>
-          <a:p>
-            <a:pPr algn="l">
-              <a:spcAft>
-                <a:spcPts val="700"/>
-              </a:spcAft>
-              <a:defRPr sz="1800" b="0">
-                <a:solidFill>
-                  <a:srgbClr val="333333"/>
-                </a:solidFill>
-                <a:latin typeface="Yu Gothic"/>
-              </a:defRPr>
-            </a:pPr>
-            <a:r>
-              <a:t>の期間短縮</a:t>
-            </a:r>
-          </a:p>
-          <a:p>
-            <a:pPr algn="l">
-              <a:spcAft>
-                <a:spcPts val="700"/>
-              </a:spcAft>
-              <a:defRPr sz="1400" b="0">
-                <a:solidFill>
-                  <a:srgbClr val="666666"/>
-                </a:solidFill>
-                <a:latin typeface="Yu Gothic"/>
-              </a:defRPr>
-            </a:pPr>
-            <a:r>
-              <a:t>コード生産速度 23〜46倍</a:t>
-            </a:r>
-          </a:p>
-        </p:txBody>
-      </p:sp>
-      <p:sp>
-        <p:nvSpPr>
-          <p:cNvPr id="8" name="Rectangle 7"/>
-          <p:cNvSpPr/>
-          <p:nvPr/>
-        </p:nvSpPr>
-        <p:spPr>
-          <a:xfrm>
-            <a:off x="4297680" y="1188720"/>
-            <a:ext cx="3474720" cy="2286000"/>
-          </a:xfrm>
-          <a:prstGeom prst="rect">
-            <a:avLst/>
-          </a:prstGeom>
-          <a:solidFill>
-            <a:srgbClr val="FFFFFF"/>
-          </a:solidFill>
           <a:ln>
             <a:noFill/>
           </a:ln>
         </p:spPr>
-        <p:style>
-          <a:lnRef idx="1">
-            <a:schemeClr val="accent1"/>
-          </a:lnRef>
-          <a:fillRef idx="3">
-            <a:schemeClr val="accent1"/>
-          </a:fillRef>
-          <a:effectRef idx="2">
-            <a:schemeClr val="accent1"/>
-          </a:effectRef>
-          <a:fontRef idx="minor">
-            <a:schemeClr val="lt1"/>
-          </a:fontRef>
-        </p:style>
-        <p:txBody>
-          <a:bodyPr rtlCol="0" anchor="ctr"/>
-          <a:lstStyle/>
-          <a:p>
-            <a:pPr algn="ctr"/>
-            <a:endParaRPr/>
-          </a:p>
-        </p:txBody>
-      </p:sp>
-      <p:sp>
-        <p:nvSpPr>
-          <p:cNvPr id="9" name="Rectangle 8"/>
-          <p:cNvSpPr/>
-          <p:nvPr/>
-        </p:nvSpPr>
-        <p:spPr>
-          <a:xfrm>
-            <a:off x="4297680" y="1188720"/>
-            <a:ext cx="73152" cy="2286000"/>
-          </a:xfrm>
-          <a:prstGeom prst="rect">
-            <a:avLst/>
-          </a:prstGeom>
-          <a:solidFill>
-            <a:srgbClr val="00A35E"/>
-          </a:solidFill>
-          <a:ln>
-            <a:noFill/>
-          </a:ln>
-        </p:spPr>
-        <p:style>
-          <a:lnRef idx="1">
-            <a:schemeClr val="accent1"/>
-          </a:lnRef>
-          <a:fillRef idx="3">
-            <a:schemeClr val="accent1"/>
-          </a:fillRef>
-          <a:effectRef idx="2">
-            <a:schemeClr val="accent1"/>
-          </a:effectRef>
-          <a:fontRef idx="minor">
-            <a:schemeClr val="lt1"/>
-          </a:fontRef>
-        </p:style>
-        <p:txBody>
-          <a:bodyPr rtlCol="0" anchor="ctr"/>
-          <a:lstStyle/>
-          <a:p>
-            <a:pPr algn="ctr"/>
-            <a:endParaRPr/>
-          </a:p>
-        </p:txBody>
-      </p:sp>
-      <p:sp>
-        <p:nvSpPr>
-          <p:cNvPr id="10" name="TextBox 9"/>
-          <p:cNvSpPr txBox="1"/>
-          <p:nvPr/>
-        </p:nvSpPr>
-        <p:spPr>
-          <a:xfrm>
-            <a:off x="4526280" y="1280160"/>
-            <a:ext cx="3108960" cy="365760"/>
-          </a:xfrm>
-          <a:prstGeom prst="rect">
-            <a:avLst/>
-          </a:prstGeom>
-          <a:noFill/>
-        </p:spPr>
-        <p:txBody>
-          <a:bodyPr wrap="square">
+        <p:txBody>
+          <a:bodyPr wrap="square" anchor="t">
             <a:spAutoFit/>
           </a:bodyPr>
           <a:lstStyle/>
           <a:p>
-            <a:pPr algn="l">
-              <a:defRPr sz="1800" b="1">
-                <a:solidFill>
-                  <a:srgbClr val="00A35E"/>
-                </a:solidFill>
-                <a:latin typeface="Yu Gothic"/>
-              </a:defRPr>
-            </a:pPr>
-            <a:r>
-              <a:t>品質向上</a:t>
-            </a:r>
-          </a:p>
-        </p:txBody>
-      </p:sp>
-      <p:sp>
-        <p:nvSpPr>
-          <p:cNvPr id="11" name="TextBox 10"/>
-          <p:cNvSpPr txBox="1"/>
-          <p:nvPr/>
-        </p:nvSpPr>
-        <p:spPr>
-          <a:xfrm>
-            <a:off x="4526280" y="1645920"/>
-            <a:ext cx="3108960" cy="1737360"/>
-          </a:xfrm>
-          <a:prstGeom prst="rect">
-            <a:avLst/>
-          </a:prstGeom>
-          <a:noFill/>
-        </p:spPr>
-        <p:txBody>
-          <a:bodyPr wrap="square">
-            <a:spAutoFit/>
-          </a:bodyPr>
-          <a:lstStyle/>
-          <a:p>
-            <a:pPr algn="l">
-              <a:spcAft>
-                <a:spcPts val="700"/>
-              </a:spcAft>
-              <a:defRPr sz="3600" b="1">
-                <a:solidFill>
-                  <a:srgbClr val="00A35E"/>
-                </a:solidFill>
-                <a:latin typeface="Yu Gothic"/>
-              </a:defRPr>
-            </a:pPr>
-            <a:r>
-              <a:t>813</a:t>
-            </a:r>
-          </a:p>
-          <a:p>
-            <a:pPr algn="l">
-              <a:spcAft>
-                <a:spcPts val="700"/>
-              </a:spcAft>
-              <a:defRPr sz="1800" b="0">
-                <a:solidFill>
-                  <a:srgbClr val="333333"/>
-                </a:solidFill>
-                <a:latin typeface="Yu Gothic"/>
-              </a:defRPr>
-            </a:pPr>
-            <a:r>
-              <a:t>テストケース自動生成</a:t>
-            </a:r>
-          </a:p>
-          <a:p>
-            <a:pPr algn="l">
-              <a:spcAft>
-                <a:spcPts val="700"/>
-              </a:spcAft>
-              <a:defRPr sz="1400" b="0">
-                <a:solidFill>
-                  <a:srgbClr val="666666"/>
-                </a:solidFill>
-                <a:latin typeface="Yu Gothic"/>
-              </a:defRPr>
-            </a:pPr>
-            <a:r>
-              <a:t>テスト密度 6倍以上</a:t>
-            </a:r>
-          </a:p>
-        </p:txBody>
-      </p:sp>
-      <p:sp>
-        <p:nvSpPr>
-          <p:cNvPr id="12" name="Rectangle 11"/>
-          <p:cNvSpPr/>
-          <p:nvPr/>
-        </p:nvSpPr>
-        <p:spPr>
-          <a:xfrm>
-            <a:off x="8138160" y="1188720"/>
-            <a:ext cx="3566160" cy="2286000"/>
-          </a:xfrm>
-          <a:prstGeom prst="rect">
-            <a:avLst/>
-          </a:prstGeom>
-          <a:solidFill>
-            <a:srgbClr val="FFFFFF"/>
-          </a:solidFill>
-          <a:ln>
-            <a:noFill/>
-          </a:ln>
-        </p:spPr>
-        <p:style>
-          <a:lnRef idx="1">
-            <a:schemeClr val="accent1"/>
-          </a:lnRef>
-          <a:fillRef idx="3">
-            <a:schemeClr val="accent1"/>
-          </a:fillRef>
-          <a:effectRef idx="2">
-            <a:schemeClr val="accent1"/>
-          </a:effectRef>
-          <a:fontRef idx="minor">
-            <a:schemeClr val="lt1"/>
-          </a:fontRef>
-        </p:style>
-        <p:txBody>
-          <a:bodyPr rtlCol="0" anchor="ctr"/>
-          <a:lstStyle/>
-          <a:p>
-            <a:pPr algn="ctr"/>
-            <a:endParaRPr/>
-          </a:p>
-        </p:txBody>
-      </p:sp>
-      <p:sp>
-        <p:nvSpPr>
-          <p:cNvPr id="13" name="Rectangle 12"/>
-          <p:cNvSpPr/>
-          <p:nvPr/>
-        </p:nvSpPr>
-        <p:spPr>
-          <a:xfrm>
-            <a:off x="8138160" y="1188720"/>
-            <a:ext cx="73152" cy="2286000"/>
-          </a:xfrm>
-          <a:prstGeom prst="rect">
-            <a:avLst/>
-          </a:prstGeom>
-          <a:solidFill>
-            <a:srgbClr val="E86C00"/>
-          </a:solidFill>
-          <a:ln>
-            <a:noFill/>
-          </a:ln>
-        </p:spPr>
-        <p:style>
-          <a:lnRef idx="1">
-            <a:schemeClr val="accent1"/>
-          </a:lnRef>
-          <a:fillRef idx="3">
-            <a:schemeClr val="accent1"/>
-          </a:fillRef>
-          <a:effectRef idx="2">
-            <a:schemeClr val="accent1"/>
-          </a:effectRef>
-          <a:fontRef idx="minor">
-            <a:schemeClr val="lt1"/>
-          </a:fontRef>
-        </p:style>
-        <p:txBody>
-          <a:bodyPr rtlCol="0" anchor="ctr"/>
-          <a:lstStyle/>
-          <a:p>
-            <a:pPr algn="ctr"/>
-            <a:endParaRPr/>
-          </a:p>
-        </p:txBody>
-      </p:sp>
-      <p:sp>
-        <p:nvSpPr>
-          <p:cNvPr id="14" name="TextBox 13"/>
-          <p:cNvSpPr txBox="1"/>
-          <p:nvPr/>
-        </p:nvSpPr>
-        <p:spPr>
-          <a:xfrm>
-            <a:off x="8366760" y="1280160"/>
-            <a:ext cx="3200400" cy="365760"/>
-          </a:xfrm>
-          <a:prstGeom prst="rect">
-            <a:avLst/>
-          </a:prstGeom>
-          <a:noFill/>
-        </p:spPr>
-        <p:txBody>
-          <a:bodyPr wrap="square">
-            <a:spAutoFit/>
-          </a:bodyPr>
-          <a:lstStyle/>
-          <a:p>
-            <a:pPr algn="l">
-              <a:defRPr sz="1800" b="1">
-                <a:solidFill>
-                  <a:srgbClr val="E86C00"/>
-                </a:solidFill>
-                <a:latin typeface="Yu Gothic"/>
-              </a:defRPr>
-            </a:pPr>
-            <a:r>
-              <a:t>コスト最適化</a:t>
-            </a:r>
-          </a:p>
-        </p:txBody>
-      </p:sp>
-      <p:sp>
-        <p:nvSpPr>
-          <p:cNvPr id="15" name="TextBox 14"/>
-          <p:cNvSpPr txBox="1"/>
-          <p:nvPr/>
-        </p:nvSpPr>
-        <p:spPr>
-          <a:xfrm>
-            <a:off x="8366760" y="1645920"/>
-            <a:ext cx="3200400" cy="1737360"/>
-          </a:xfrm>
-          <a:prstGeom prst="rect">
-            <a:avLst/>
-          </a:prstGeom>
-          <a:noFill/>
-        </p:spPr>
-        <p:txBody>
-          <a:bodyPr wrap="square">
-            <a:spAutoFit/>
-          </a:bodyPr>
-          <a:lstStyle/>
-          <a:p>
-            <a:pPr algn="l">
-              <a:spcAft>
-                <a:spcPts val="700"/>
-              </a:spcAft>
-              <a:defRPr sz="3600" b="1">
-                <a:solidFill>
-                  <a:srgbClr val="E86C00"/>
-                </a:solidFill>
-                <a:latin typeface="Yu Gothic"/>
-              </a:defRPr>
-            </a:pPr>
-            <a:r>
-              <a:t>-73%</a:t>
-            </a:r>
-          </a:p>
-          <a:p>
-            <a:pPr algn="l">
-              <a:spcAft>
-                <a:spcPts val="700"/>
-              </a:spcAft>
-              <a:defRPr sz="1800" b="0">
-                <a:solidFill>
-                  <a:srgbClr val="333333"/>
-                </a:solidFill>
-                <a:latin typeface="Yu Gothic"/>
-              </a:defRPr>
-            </a:pPr>
-            <a:r>
-              <a:t>トークンコスト削減</a:t>
-            </a:r>
-          </a:p>
-          <a:p>
-            <a:pPr algn="l">
-              <a:spcAft>
-                <a:spcPts val="700"/>
-              </a:spcAft>
-              <a:defRPr sz="1400" b="0">
-                <a:solidFill>
-                  <a:srgbClr val="666666"/>
-                </a:solidFill>
-                <a:latin typeface="Yu Gothic"/>
-              </a:defRPr>
-            </a:pPr>
-            <a:r>
-              <a:t>Level 5 最適化による</a:t>
-            </a:r>
-          </a:p>
-        </p:txBody>
-      </p:sp>
-      <p:sp>
-        <p:nvSpPr>
-          <p:cNvPr id="16" name="Rectangle 15"/>
-          <p:cNvSpPr/>
-          <p:nvPr/>
-        </p:nvSpPr>
-        <p:spPr>
-          <a:xfrm>
-            <a:off x="457200" y="3749039"/>
-            <a:ext cx="11247120" cy="2743200"/>
-          </a:xfrm>
-          <a:prstGeom prst="rect">
-            <a:avLst/>
-          </a:prstGeom>
-          <a:solidFill>
-            <a:srgbClr val="FFFFFF"/>
-          </a:solidFill>
-          <a:ln>
-            <a:noFill/>
-          </a:ln>
-        </p:spPr>
-        <p:style>
-          <a:lnRef idx="1">
-            <a:schemeClr val="accent1"/>
-          </a:lnRef>
-          <a:fillRef idx="3">
-            <a:schemeClr val="accent1"/>
-          </a:fillRef>
-          <a:effectRef idx="2">
-            <a:schemeClr val="accent1"/>
-          </a:effectRef>
-          <a:fontRef idx="minor">
-            <a:schemeClr val="lt1"/>
-          </a:fontRef>
-        </p:style>
-        <p:txBody>
-          <a:bodyPr rtlCol="0" anchor="ctr"/>
-          <a:lstStyle/>
-          <a:p>
-            <a:pPr algn="ctr"/>
-            <a:endParaRPr/>
-          </a:p>
-        </p:txBody>
-      </p:sp>
-      <p:sp>
-        <p:nvSpPr>
-          <p:cNvPr id="17" name="Rectangle 16"/>
-          <p:cNvSpPr/>
-          <p:nvPr/>
-        </p:nvSpPr>
-        <p:spPr>
-          <a:xfrm>
-            <a:off x="457200" y="3749039"/>
-            <a:ext cx="73152" cy="2743200"/>
-          </a:xfrm>
-          <a:prstGeom prst="rect">
-            <a:avLst/>
-          </a:prstGeom>
-          <a:solidFill>
-            <a:srgbClr val="1B3A5C"/>
-          </a:solidFill>
-          <a:ln>
-            <a:noFill/>
-          </a:ln>
-        </p:spPr>
-        <p:style>
-          <a:lnRef idx="1">
-            <a:schemeClr val="accent1"/>
-          </a:lnRef>
-          <a:fillRef idx="3">
-            <a:schemeClr val="accent1"/>
-          </a:fillRef>
-          <a:effectRef idx="2">
-            <a:schemeClr val="accent1"/>
-          </a:effectRef>
-          <a:fontRef idx="minor">
-            <a:schemeClr val="lt1"/>
-          </a:fontRef>
-        </p:style>
-        <p:txBody>
-          <a:bodyPr rtlCol="0" anchor="ctr"/>
-          <a:lstStyle/>
-          <a:p>
-            <a:pPr algn="ctr"/>
-            <a:endParaRPr/>
-          </a:p>
-        </p:txBody>
-      </p:sp>
-      <p:sp>
-        <p:nvSpPr>
-          <p:cNvPr id="18" name="TextBox 17"/>
-          <p:cNvSpPr txBox="1"/>
-          <p:nvPr/>
-        </p:nvSpPr>
-        <p:spPr>
-          <a:xfrm>
-            <a:off x="685800" y="3840479"/>
-            <a:ext cx="10881360" cy="365760"/>
-          </a:xfrm>
-          <a:prstGeom prst="rect">
-            <a:avLst/>
-          </a:prstGeom>
-          <a:noFill/>
-        </p:spPr>
-        <p:txBody>
-          <a:bodyPr wrap="square">
-            <a:spAutoFit/>
-          </a:bodyPr>
-          <a:lstStyle/>
-          <a:p>
-            <a:pPr algn="l">
-              <a:defRPr sz="1800" b="1">
-                <a:solidFill>
-                  <a:srgbClr val="1B3A5C"/>
-                </a:solidFill>
-                <a:latin typeface="Yu Gothic"/>
-              </a:defRPr>
-            </a:pPr>
-            <a:r>
-              <a:t>結論</a:t>
-            </a:r>
-          </a:p>
-        </p:txBody>
-      </p:sp>
-      <p:sp>
-        <p:nvSpPr>
-          <p:cNvPr id="19" name="TextBox 18"/>
-          <p:cNvSpPr txBox="1"/>
-          <p:nvPr/>
-        </p:nvSpPr>
-        <p:spPr>
-          <a:xfrm>
-            <a:off x="685800" y="4206239"/>
-            <a:ext cx="10881360" cy="2194560"/>
-          </a:xfrm>
-          <a:prstGeom prst="rect">
-            <a:avLst/>
-          </a:prstGeom>
-          <a:noFill/>
-        </p:spPr>
-        <p:txBody>
-          <a:bodyPr wrap="square">
-            <a:spAutoFit/>
-          </a:bodyPr>
-          <a:lstStyle/>
-          <a:p>
-            <a:pPr algn="l">
-              <a:spcAft>
-                <a:spcPts val="700"/>
-              </a:spcAft>
-              <a:defRPr sz="1800" b="1">
-                <a:solidFill>
-                  <a:srgbClr val="1B3A5C"/>
-                </a:solidFill>
-                <a:latin typeface="Yu Gothic"/>
-              </a:defRPr>
-            </a:pPr>
-            <a:r>
-              <a:t>AI駆動開発は「スクラッチ開発」で最大の効果を発揮する</a:t>
-            </a:r>
-          </a:p>
-          <a:p>
-            <a:pPr algn="l">
-              <a:spcAft>
-                <a:spcPts val="700"/>
-              </a:spcAft>
-              <a:defRPr sz="600" b="0">
-                <a:solidFill>
-                  <a:srgbClr val="333333"/>
-                </a:solidFill>
-                <a:latin typeface="Yu Gothic"/>
-              </a:defRPr>
-            </a:pPr>
-            <a:endParaRPr/>
-          </a:p>
-          <a:p>
-            <a:pPr algn="l">
-              <a:spcAft>
-                <a:spcPts val="700"/>
-              </a:spcAft>
-              <a:defRPr sz="1500" b="0">
-                <a:solidFill>
-                  <a:srgbClr val="333333"/>
-                </a:solidFill>
-                <a:latin typeface="Yu Gothic"/>
-              </a:defRPr>
-            </a:pPr>
-            <a:r>
-              <a:t>スクラッチ開発: コード生成〜テスト〜CI/CDまで全工程をAIが一貫支援。6〜9倍の期間短縮。</a:t>
-            </a:r>
-          </a:p>
-          <a:p>
-            <a:pPr algn="l">
-              <a:spcAft>
-                <a:spcPts val="700"/>
-              </a:spcAft>
-              <a:defRPr sz="1500" b="0">
-                <a:solidFill>
-                  <a:srgbClr val="333333"/>
-                </a:solidFill>
-                <a:latin typeface="Yu Gothic"/>
-              </a:defRPr>
-            </a:pPr>
-            <a:r>
-              <a:t>ローコード/ノーコード: コード生成の恩恵は限定的だが、設計レビュー・要件定義・ドキュメント作成では有効。</a:t>
-            </a:r>
-          </a:p>
-          <a:p>
-            <a:pPr algn="l">
-              <a:spcAft>
-                <a:spcPts val="700"/>
-              </a:spcAft>
-              <a:defRPr sz="600" b="0">
-                <a:solidFill>
-                  <a:srgbClr val="333333"/>
-                </a:solidFill>
-                <a:latin typeface="Yu Gothic"/>
-              </a:defRPr>
-            </a:pPr>
-            <a:endParaRPr/>
-          </a:p>
-          <a:p>
-            <a:pPr algn="l">
-              <a:spcAft>
-                <a:spcPts val="700"/>
-              </a:spcAft>
-              <a:defRPr sz="1500" b="1">
-                <a:solidFill>
-                  <a:srgbClr val="007ACC"/>
-                </a:solidFill>
-                <a:latin typeface="Yu Gothic"/>
-              </a:defRPr>
-            </a:pPr>
-            <a:r>
-              <a:t>AIは「人間の意思決定を高速に具現化するエンジン」。ビジョン・ドメイン設計・UX判断は引き続き人間の役割。</a:t>
+            <a:pPr algn="l"/>
+            <a:r>
+              <a:rPr sz="900" b="0">
+                <a:solidFill>
+                  <a:srgbClr val="6C757D"/>
+                </a:solidFill>
+                <a:latin typeface="Yu Gothic UI"/>
+              </a:rPr>
+              <a:t>AIタスクフォース 成果報告  |  Claude Code 成熟度レベル比較  |  p.13</a:t>
             </a:r>
           </a:p>
         </p:txBody>
       </p:sp>
     </p:spTree>
-    <p:extLst>
-      <p:ext uri="{BB962C8B-B14F-4D97-AF65-F5344CB8AC3E}">
-        <p14:creationId xmlns:p14="http://schemas.microsoft.com/office/powerpoint/2010/main" val="574259836"/>
-      </p:ext>
-    </p:extLst>
   </p:cSld>
   <p:clrMapOvr>
     <a:masterClrMapping/>
@@ -5345,6 +4514,3581 @@
       </p:grpSpPr>
       <p:sp>
         <p:nvSpPr>
+          <p:cNvPr id="2" name="TextBox 1"/>
+          <p:cNvSpPr txBox="1"/>
+          <p:nvPr/>
+        </p:nvSpPr>
+        <p:spPr>
+          <a:xfrm>
+            <a:off x="365760" y="274320"/>
+            <a:ext cx="11430000" cy="640080"/>
+          </a:xfrm>
+          <a:prstGeom prst="rect">
+            <a:avLst/>
+          </a:prstGeom>
+          <a:noFill/>
+          <a:ln>
+            <a:noFill/>
+          </a:ln>
+        </p:spPr>
+        <p:txBody>
+          <a:bodyPr wrap="square" anchor="t">
+            <a:spAutoFit/>
+          </a:bodyPr>
+          <a:lstStyle/>
+          <a:p>
+            <a:pPr algn="l"/>
+            <a:r>
+              <a:rPr sz="2600" b="1">
+                <a:solidFill>
+                  <a:srgbClr val="1F3A5F"/>
+                </a:solidFill>
+                <a:latin typeface="Yu Gothic UI"/>
+              </a:rPr>
+              <a:t>補足①: AIエージェントとは何か</a:t>
+            </a:r>
+          </a:p>
+        </p:txBody>
+      </p:sp>
+      <p:sp>
+        <p:nvSpPr>
+          <p:cNvPr id="3" name="TextBox 2"/>
+          <p:cNvSpPr txBox="1"/>
+          <p:nvPr/>
+        </p:nvSpPr>
+        <p:spPr>
+          <a:xfrm>
+            <a:off x="365760" y="914400"/>
+            <a:ext cx="11430000" cy="365760"/>
+          </a:xfrm>
+          <a:prstGeom prst="rect">
+            <a:avLst/>
+          </a:prstGeom>
+          <a:noFill/>
+          <a:ln>
+            <a:noFill/>
+          </a:ln>
+        </p:spPr>
+        <p:txBody>
+          <a:bodyPr wrap="square" anchor="t">
+            <a:spAutoFit/>
+          </a:bodyPr>
+          <a:lstStyle/>
+          <a:p>
+            <a:pPr algn="l"/>
+            <a:r>
+              <a:rPr sz="1400" b="0">
+                <a:solidFill>
+                  <a:srgbClr val="6C757D"/>
+                </a:solidFill>
+                <a:latin typeface="Yu Gothic UI"/>
+              </a:rPr>
+              <a:t>「目標を与えると自律的に行動するAIシステム」— 従来のチャットAIとの本質的な違い</a:t>
+            </a:r>
+          </a:p>
+        </p:txBody>
+      </p:sp>
+      <p:sp>
+        <p:nvSpPr>
+          <p:cNvPr id="4" name="TextBox 3"/>
+          <p:cNvSpPr txBox="1"/>
+          <p:nvPr/>
+        </p:nvSpPr>
+        <p:spPr>
+          <a:xfrm>
+            <a:off x="365760" y="1463040"/>
+            <a:ext cx="11430000" cy="731520"/>
+          </a:xfrm>
+          <a:prstGeom prst="rect">
+            <a:avLst/>
+          </a:prstGeom>
+          <a:solidFill>
+            <a:srgbClr val="1F3A5F"/>
+          </a:solidFill>
+          <a:ln>
+            <a:solidFill>
+              <a:srgbClr val="1F3A5F"/>
+            </a:solidFill>
+          </a:ln>
+        </p:spPr>
+        <p:txBody>
+          <a:bodyPr wrap="square" anchor="ctr">
+            <a:spAutoFit/>
+          </a:bodyPr>
+          <a:lstStyle/>
+          <a:p>
+            <a:pPr algn="ctr"/>
+            <a:r>
+              <a:rPr sz="1400" b="1">
+                <a:solidFill>
+                  <a:srgbClr val="FFFFFF"/>
+                </a:solidFill>
+                <a:latin typeface="Yu Gothic UI"/>
+              </a:rPr>
+              <a:t>定義: 目標を与えられると、環境を認識し、ツールを使い、複数ステップで自律的に判断・実行するAIシステム</a:t>
+            </a:r>
+          </a:p>
+        </p:txBody>
+      </p:sp>
+      <p:sp>
+        <p:nvSpPr>
+          <p:cNvPr id="5" name="Rounded Rectangle 4"/>
+          <p:cNvSpPr/>
+          <p:nvPr/>
+        </p:nvSpPr>
+        <p:spPr>
+          <a:xfrm>
+            <a:off x="365760" y="2468880"/>
+            <a:ext cx="3657600" cy="1554480"/>
+          </a:xfrm>
+          <a:prstGeom prst="roundRect">
+            <a:avLst/>
+          </a:prstGeom>
+          <a:solidFill>
+            <a:srgbClr val="F4F6F8"/>
+          </a:solidFill>
+          <a:ln w="9525">
+            <a:solidFill>
+              <a:srgbClr val="2E86AB"/>
+            </a:solidFill>
+          </a:ln>
+          <a:effectLst/>
+        </p:spPr>
+        <p:style>
+          <a:lnRef idx="1">
+            <a:schemeClr val="accent1"/>
+          </a:lnRef>
+          <a:fillRef idx="3">
+            <a:schemeClr val="accent1"/>
+          </a:fillRef>
+          <a:effectRef idx="2">
+            <a:schemeClr val="accent1"/>
+          </a:effectRef>
+          <a:fontRef idx="minor">
+            <a:schemeClr val="lt1"/>
+          </a:fontRef>
+        </p:style>
+        <p:txBody>
+          <a:bodyPr wrap="square" lIns="137160" tIns="91440" rIns="137160" bIns="91440" rtlCol="0" anchor="ctr"/>
+          <a:lstStyle/>
+          <a:p>
+            <a:pPr algn="l"/>
+            <a:r>
+              <a:rPr sz="1400" b="1">
+                <a:solidFill>
+                  <a:srgbClr val="1F3A5F"/>
+                </a:solidFill>
+                <a:latin typeface="Yu Gothic UI"/>
+              </a:rPr>
+              <a:t>① 目標指向</a:t>
+            </a:r>
+          </a:p>
+          <a:p>
+            <a:pPr algn="l"/>
+            <a:r>
+              <a:rPr sz="1100">
+                <a:solidFill>
+                  <a:srgbClr val="212529"/>
+                </a:solidFill>
+                <a:latin typeface="Yu Gothic UI"/>
+              </a:rPr>
+              <a:t>ゴールを与えられて動く</a:t>
+            </a:r>
+          </a:p>
+          <a:p>
+            <a:pPr algn="l"/>
+            <a:r>
+              <a:rPr sz="1100">
+                <a:solidFill>
+                  <a:srgbClr val="212529"/>
+                </a:solidFill>
+                <a:latin typeface="Yu Gothic UI"/>
+              </a:rPr>
+              <a:t>例: 「このバグを修正して」</a:t>
+            </a:r>
+          </a:p>
+          <a:p>
+            <a:pPr algn="l"/>
+            <a:r>
+              <a:rPr sz="1100">
+                <a:solidFill>
+                  <a:srgbClr val="212529"/>
+                </a:solidFill>
+                <a:latin typeface="Yu Gothic UI"/>
+              </a:rPr>
+              <a:t>→ 質問ではなく「依頼」を受ける</a:t>
+            </a:r>
+          </a:p>
+        </p:txBody>
+      </p:sp>
+      <p:sp>
+        <p:nvSpPr>
+          <p:cNvPr id="6" name="Rounded Rectangle 5"/>
+          <p:cNvSpPr/>
+          <p:nvPr/>
+        </p:nvSpPr>
+        <p:spPr>
+          <a:xfrm>
+            <a:off x="4251960" y="2468880"/>
+            <a:ext cx="3657600" cy="1554480"/>
+          </a:xfrm>
+          <a:prstGeom prst="roundRect">
+            <a:avLst/>
+          </a:prstGeom>
+          <a:solidFill>
+            <a:srgbClr val="F4F6F8"/>
+          </a:solidFill>
+          <a:ln w="9525">
+            <a:solidFill>
+              <a:srgbClr val="2E86AB"/>
+            </a:solidFill>
+          </a:ln>
+          <a:effectLst/>
+        </p:spPr>
+        <p:style>
+          <a:lnRef idx="1">
+            <a:schemeClr val="accent1"/>
+          </a:lnRef>
+          <a:fillRef idx="3">
+            <a:schemeClr val="accent1"/>
+          </a:fillRef>
+          <a:effectRef idx="2">
+            <a:schemeClr val="accent1"/>
+          </a:effectRef>
+          <a:fontRef idx="minor">
+            <a:schemeClr val="lt1"/>
+          </a:fontRef>
+        </p:style>
+        <p:txBody>
+          <a:bodyPr wrap="square" lIns="137160" tIns="91440" rIns="137160" bIns="91440" rtlCol="0" anchor="ctr"/>
+          <a:lstStyle/>
+          <a:p>
+            <a:pPr algn="l"/>
+            <a:r>
+              <a:rPr sz="1400" b="1">
+                <a:solidFill>
+                  <a:srgbClr val="1F3A5F"/>
+                </a:solidFill>
+                <a:latin typeface="Yu Gothic UI"/>
+              </a:rPr>
+              <a:t>② ツール使用</a:t>
+            </a:r>
+          </a:p>
+          <a:p>
+            <a:pPr algn="l"/>
+            <a:r>
+              <a:rPr sz="1100">
+                <a:solidFill>
+                  <a:srgbClr val="212529"/>
+                </a:solidFill>
+                <a:latin typeface="Yu Gothic UI"/>
+              </a:rPr>
+              <a:t>ファイル・API・コマンドを実行</a:t>
+            </a:r>
+          </a:p>
+          <a:p>
+            <a:pPr algn="l"/>
+            <a:r>
+              <a:rPr sz="1100">
+                <a:solidFill>
+                  <a:srgbClr val="212529"/>
+                </a:solidFill>
+                <a:latin typeface="Yu Gothic UI"/>
+              </a:rPr>
+              <a:t>例: Read / Write / Bash / Web検索</a:t>
+            </a:r>
+          </a:p>
+          <a:p>
+            <a:pPr algn="l"/>
+            <a:r>
+              <a:rPr sz="1100">
+                <a:solidFill>
+                  <a:srgbClr val="212529"/>
+                </a:solidFill>
+                <a:latin typeface="Yu Gothic UI"/>
+              </a:rPr>
+              <a:t>→ 実世界に働きかけられる</a:t>
+            </a:r>
+          </a:p>
+        </p:txBody>
+      </p:sp>
+      <p:sp>
+        <p:nvSpPr>
+          <p:cNvPr id="7" name="Rounded Rectangle 6"/>
+          <p:cNvSpPr/>
+          <p:nvPr/>
+        </p:nvSpPr>
+        <p:spPr>
+          <a:xfrm>
+            <a:off x="8138160" y="2468880"/>
+            <a:ext cx="3657600" cy="1554480"/>
+          </a:xfrm>
+          <a:prstGeom prst="roundRect">
+            <a:avLst/>
+          </a:prstGeom>
+          <a:solidFill>
+            <a:srgbClr val="F4F6F8"/>
+          </a:solidFill>
+          <a:ln w="9525">
+            <a:solidFill>
+              <a:srgbClr val="2E86AB"/>
+            </a:solidFill>
+          </a:ln>
+          <a:effectLst/>
+        </p:spPr>
+        <p:style>
+          <a:lnRef idx="1">
+            <a:schemeClr val="accent1"/>
+          </a:lnRef>
+          <a:fillRef idx="3">
+            <a:schemeClr val="accent1"/>
+          </a:fillRef>
+          <a:effectRef idx="2">
+            <a:schemeClr val="accent1"/>
+          </a:effectRef>
+          <a:fontRef idx="minor">
+            <a:schemeClr val="lt1"/>
+          </a:fontRef>
+        </p:style>
+        <p:txBody>
+          <a:bodyPr wrap="square" lIns="137160" tIns="91440" rIns="137160" bIns="91440" rtlCol="0" anchor="ctr"/>
+          <a:lstStyle/>
+          <a:p>
+            <a:pPr algn="l"/>
+            <a:r>
+              <a:rPr sz="1400" b="1">
+                <a:solidFill>
+                  <a:srgbClr val="1F3A5F"/>
+                </a:solidFill>
+                <a:latin typeface="Yu Gothic UI"/>
+              </a:rPr>
+              <a:t>③ 自律的ループ</a:t>
+            </a:r>
+          </a:p>
+          <a:p>
+            <a:pPr algn="l"/>
+            <a:r>
+              <a:rPr sz="1100">
+                <a:solidFill>
+                  <a:srgbClr val="212529"/>
+                </a:solidFill>
+                <a:latin typeface="Yu Gothic UI"/>
+              </a:rPr>
+              <a:t>結果を見て次の手を決定</a:t>
+            </a:r>
+          </a:p>
+          <a:p>
+            <a:pPr algn="l"/>
+            <a:r>
+              <a:rPr sz="1100">
+                <a:solidFill>
+                  <a:srgbClr val="212529"/>
+                </a:solidFill>
+                <a:latin typeface="Yu Gothic UI"/>
+              </a:rPr>
+              <a:t>例: テスト失敗→原因調査→修正→再実行</a:t>
+            </a:r>
+          </a:p>
+          <a:p>
+            <a:pPr algn="l"/>
+            <a:r>
+              <a:rPr sz="1100">
+                <a:solidFill>
+                  <a:srgbClr val="212529"/>
+                </a:solidFill>
+                <a:latin typeface="Yu Gothic UI"/>
+              </a:rPr>
+              <a:t>→ 人間の監督なしで進む</a:t>
+            </a:r>
+          </a:p>
+        </p:txBody>
+      </p:sp>
+      <p:sp>
+        <p:nvSpPr>
+          <p:cNvPr id="8" name="TextBox 7"/>
+          <p:cNvSpPr txBox="1"/>
+          <p:nvPr/>
+        </p:nvSpPr>
+        <p:spPr>
+          <a:xfrm>
+            <a:off x="365760" y="4297680"/>
+            <a:ext cx="11430000" cy="365760"/>
+          </a:xfrm>
+          <a:prstGeom prst="rect">
+            <a:avLst/>
+          </a:prstGeom>
+          <a:noFill/>
+          <a:ln>
+            <a:noFill/>
+          </a:ln>
+        </p:spPr>
+        <p:txBody>
+          <a:bodyPr wrap="square" anchor="t">
+            <a:spAutoFit/>
+          </a:bodyPr>
+          <a:lstStyle/>
+          <a:p>
+            <a:pPr algn="l"/>
+            <a:r>
+              <a:rPr sz="1300" b="1">
+                <a:solidFill>
+                  <a:srgbClr val="2E86AB"/>
+                </a:solidFill>
+                <a:latin typeface="Yu Gothic UI"/>
+              </a:rPr>
+              <a:t>AI の進化 3段階</a:t>
+            </a:r>
+          </a:p>
+        </p:txBody>
+      </p:sp>
+      <p:sp>
+        <p:nvSpPr>
+          <p:cNvPr id="9" name="TextBox 8"/>
+          <p:cNvSpPr txBox="1"/>
+          <p:nvPr/>
+        </p:nvSpPr>
+        <p:spPr>
+          <a:xfrm>
+            <a:off x="365760" y="4663440"/>
+            <a:ext cx="11430000" cy="1645920"/>
+          </a:xfrm>
+          <a:prstGeom prst="rect">
+            <a:avLst/>
+          </a:prstGeom>
+          <a:noFill/>
+          <a:ln>
+            <a:noFill/>
+          </a:ln>
+        </p:spPr>
+        <p:txBody>
+          <a:bodyPr wrap="square" anchor="t">
+            <a:spAutoFit/>
+          </a:bodyPr>
+          <a:lstStyle/>
+          <a:p>
+            <a:pPr algn="l"/>
+            <a:r>
+              <a:rPr sz="1200" b="0">
+                <a:solidFill>
+                  <a:srgbClr val="212529"/>
+                </a:solidFill>
+                <a:latin typeface="Yu Gothic UI"/>
+              </a:rPr>
+              <a:t>第1世代 チャットボット (〜2022) : ルールベース / 定型応答</a:t>
+            </a:r>
+          </a:p>
+          <a:p>
+            <a:pPr algn="l"/>
+            <a:r>
+              <a:rPr sz="1200" b="0">
+                <a:solidFill>
+                  <a:srgbClr val="212529"/>
+                </a:solidFill>
+                <a:latin typeface="Yu Gothic UI"/>
+              </a:rPr>
+              <a:t>第2世代 対話型LLM   (2022〜)   : ChatGPT, Claude — 高度な言語理解、ただし「会話」止まり</a:t>
+            </a:r>
+          </a:p>
+          <a:p>
+            <a:pPr algn="l"/>
+            <a:r>
+              <a:rPr sz="1200" b="0">
+                <a:solidFill>
+                  <a:srgbClr val="212529"/>
+                </a:solidFill>
+                <a:latin typeface="Yu Gothic UI"/>
+              </a:rPr>
+              <a:t>第3世代 AIエージェント (2024〜) : 自律的に実行 — Claude Code, Cursor, Devin 等</a:t>
+            </a:r>
+          </a:p>
+        </p:txBody>
+      </p:sp>
+      <p:sp>
+        <p:nvSpPr>
+          <p:cNvPr id="10" name="TextBox 9"/>
+          <p:cNvSpPr txBox="1"/>
+          <p:nvPr/>
+        </p:nvSpPr>
+        <p:spPr>
+          <a:xfrm>
+            <a:off x="365760" y="6400800"/>
+            <a:ext cx="11430000" cy="274320"/>
+          </a:xfrm>
+          <a:prstGeom prst="rect">
+            <a:avLst/>
+          </a:prstGeom>
+          <a:noFill/>
+          <a:ln>
+            <a:noFill/>
+          </a:ln>
+        </p:spPr>
+        <p:txBody>
+          <a:bodyPr wrap="square" anchor="t">
+            <a:spAutoFit/>
+          </a:bodyPr>
+          <a:lstStyle/>
+          <a:p>
+            <a:pPr algn="l"/>
+            <a:r>
+              <a:rPr sz="900" b="0">
+                <a:solidFill>
+                  <a:srgbClr val="6C757D"/>
+                </a:solidFill>
+                <a:latin typeface="Yu Gothic UI"/>
+              </a:rPr>
+              <a:t>AIタスクフォース 成果報告  |  Claude Code 成熟度レベル比較  |  p.14</a:t>
+            </a:r>
+          </a:p>
+        </p:txBody>
+      </p:sp>
+    </p:spTree>
+  </p:cSld>
+  <p:clrMapOvr>
+    <a:masterClrMapping/>
+  </p:clrMapOvr>
+</p:sld>
+</file>
+
+<file path=ppt/slides/slide13.xml><?xml version="1.0" encoding="utf-8"?>
+<p:sld xmlns:a="http://schemas.openxmlformats.org/drawingml/2006/main" xmlns:r="http://schemas.openxmlformats.org/officeDocument/2006/relationships" xmlns:p="http://schemas.openxmlformats.org/presentationml/2006/main">
+  <p:cSld>
+    <p:spTree>
+      <p:nvGrpSpPr>
+        <p:cNvPr id="1" name=""/>
+        <p:cNvGrpSpPr/>
+        <p:nvPr/>
+      </p:nvGrpSpPr>
+      <p:grpSpPr>
+        <a:xfrm>
+          <a:off x="0" y="0"/>
+          <a:ext cx="0" cy="0"/>
+          <a:chOff x="0" y="0"/>
+          <a:chExt cx="0" cy="0"/>
+        </a:xfrm>
+      </p:grpSpPr>
+      <p:sp>
+        <p:nvSpPr>
+          <p:cNvPr id="2" name="TextBox 1"/>
+          <p:cNvSpPr txBox="1"/>
+          <p:nvPr/>
+        </p:nvSpPr>
+        <p:spPr>
+          <a:xfrm>
+            <a:off x="365760" y="274320"/>
+            <a:ext cx="11430000" cy="640080"/>
+          </a:xfrm>
+          <a:prstGeom prst="rect">
+            <a:avLst/>
+          </a:prstGeom>
+          <a:noFill/>
+          <a:ln>
+            <a:noFill/>
+          </a:ln>
+        </p:spPr>
+        <p:txBody>
+          <a:bodyPr wrap="square" anchor="t">
+            <a:spAutoFit/>
+          </a:bodyPr>
+          <a:lstStyle/>
+          <a:p>
+            <a:pPr algn="l"/>
+            <a:r>
+              <a:rPr sz="2600" b="1">
+                <a:solidFill>
+                  <a:srgbClr val="1F3A5F"/>
+                </a:solidFill>
+                <a:latin typeface="Yu Gothic UI"/>
+              </a:rPr>
+              <a:t>補足②: AIエージェントの動作原理</a:t>
+            </a:r>
+          </a:p>
+        </p:txBody>
+      </p:sp>
+      <p:sp>
+        <p:nvSpPr>
+          <p:cNvPr id="3" name="TextBox 2"/>
+          <p:cNvSpPr txBox="1"/>
+          <p:nvPr/>
+        </p:nvSpPr>
+        <p:spPr>
+          <a:xfrm>
+            <a:off x="365760" y="914400"/>
+            <a:ext cx="11430000" cy="365760"/>
+          </a:xfrm>
+          <a:prstGeom prst="rect">
+            <a:avLst/>
+          </a:prstGeom>
+          <a:noFill/>
+          <a:ln>
+            <a:noFill/>
+          </a:ln>
+        </p:spPr>
+        <p:txBody>
+          <a:bodyPr wrap="square" anchor="t">
+            <a:spAutoFit/>
+          </a:bodyPr>
+          <a:lstStyle/>
+          <a:p>
+            <a:pPr algn="l"/>
+            <a:r>
+              <a:rPr sz="1400" b="0">
+                <a:solidFill>
+                  <a:srgbClr val="6C757D"/>
+                </a:solidFill>
+                <a:latin typeface="Yu Gothic UI"/>
+              </a:rPr>
+              <a:t>ReAct パターン — 観察→思考→行動→観察のループで目標達成</a:t>
+            </a:r>
+          </a:p>
+        </p:txBody>
+      </p:sp>
+      <p:sp>
+        <p:nvSpPr>
+          <p:cNvPr id="4" name="TextBox 3"/>
+          <p:cNvSpPr txBox="1"/>
+          <p:nvPr/>
+        </p:nvSpPr>
+        <p:spPr>
+          <a:xfrm>
+            <a:off x="365760" y="1463040"/>
+            <a:ext cx="5303520" cy="365760"/>
+          </a:xfrm>
+          <a:prstGeom prst="rect">
+            <a:avLst/>
+          </a:prstGeom>
+          <a:noFill/>
+          <a:ln>
+            <a:noFill/>
+          </a:ln>
+        </p:spPr>
+        <p:txBody>
+          <a:bodyPr wrap="square" anchor="t">
+            <a:spAutoFit/>
+          </a:bodyPr>
+          <a:lstStyle/>
+          <a:p>
+            <a:pPr algn="l"/>
+            <a:r>
+              <a:rPr sz="1300" b="1">
+                <a:solidFill>
+                  <a:srgbClr val="2E86AB"/>
+                </a:solidFill>
+                <a:latin typeface="Yu Gothic UI"/>
+              </a:rPr>
+              <a:t>基本アーキテクチャ</a:t>
+            </a:r>
+          </a:p>
+        </p:txBody>
+      </p:sp>
+      <p:sp>
+        <p:nvSpPr>
+          <p:cNvPr id="5" name="TextBox 4"/>
+          <p:cNvSpPr txBox="1"/>
+          <p:nvPr/>
+        </p:nvSpPr>
+        <p:spPr>
+          <a:xfrm>
+            <a:off x="365760" y="1828800"/>
+            <a:ext cx="5303520" cy="4114800"/>
+          </a:xfrm>
+          <a:prstGeom prst="rect">
+            <a:avLst/>
+          </a:prstGeom>
+          <a:solidFill>
+            <a:srgbClr val="F4F6F8"/>
+          </a:solidFill>
+          <a:ln>
+            <a:solidFill>
+              <a:srgbClr val="F4F6F8"/>
+            </a:solidFill>
+          </a:ln>
+        </p:spPr>
+        <p:txBody>
+          <a:bodyPr wrap="square" anchor="t">
+            <a:spAutoFit/>
+          </a:bodyPr>
+          <a:lstStyle/>
+          <a:p>
+            <a:pPr algn="l"/>
+            <a:r>
+              <a:rPr sz="1200" b="0">
+                <a:solidFill>
+                  <a:srgbClr val="212529"/>
+                </a:solidFill>
+                <a:latin typeface="Yu Gothic UI"/>
+              </a:rPr>
+              <a:t>① LLM (頭脳)</a:t>
+            </a:r>
+          </a:p>
+          <a:p>
+            <a:pPr algn="l"/>
+            <a:r>
+              <a:rPr sz="1200" b="0">
+                <a:solidFill>
+                  <a:srgbClr val="212529"/>
+                </a:solidFill>
+                <a:latin typeface="Yu Gothic UI"/>
+              </a:rPr>
+              <a:t>   推論・計画・判断</a:t>
+            </a:r>
+          </a:p>
+          <a:p>
+            <a:pPr algn="l"/>
+            <a:r>
+              <a:rPr sz="1200" b="0">
+                <a:solidFill>
+                  <a:srgbClr val="212529"/>
+                </a:solidFill>
+                <a:latin typeface="Yu Gothic UI"/>
+              </a:rPr>
+              <a:t>   Claude / GPT-4 等</a:t>
+            </a:r>
+          </a:p>
+          <a:p>
+            <a:pPr algn="l"/>
+            <a:endParaRPr sz="1200" b="0">
+              <a:solidFill>
+                <a:srgbClr val="212529"/>
+              </a:solidFill>
+              <a:latin typeface="Yu Gothic UI"/>
+            </a:endParaRPr>
+          </a:p>
+          <a:p>
+            <a:pPr algn="l"/>
+            <a:r>
+              <a:rPr sz="1200" b="0">
+                <a:solidFill>
+                  <a:srgbClr val="212529"/>
+                </a:solidFill>
+                <a:latin typeface="Yu Gothic UI"/>
+              </a:rPr>
+              <a:t>② メモリ / コンテキスト</a:t>
+            </a:r>
+          </a:p>
+          <a:p>
+            <a:pPr algn="l"/>
+            <a:r>
+              <a:rPr sz="1200" b="0">
+                <a:solidFill>
+                  <a:srgbClr val="212529"/>
+                </a:solidFill>
+                <a:latin typeface="Yu Gothic UI"/>
+              </a:rPr>
+              <a:t>   会話履歴・過去の行動結果</a:t>
+            </a:r>
+          </a:p>
+          <a:p>
+            <a:pPr algn="l"/>
+            <a:r>
+              <a:rPr sz="1200" b="0">
+                <a:solidFill>
+                  <a:srgbClr val="212529"/>
+                </a:solidFill>
+                <a:latin typeface="Yu Gothic UI"/>
+              </a:rPr>
+              <a:t>   長期記憶 (RAG など)</a:t>
+            </a:r>
+          </a:p>
+          <a:p>
+            <a:pPr algn="l"/>
+            <a:endParaRPr sz="1200" b="0">
+              <a:solidFill>
+                <a:srgbClr val="212529"/>
+              </a:solidFill>
+              <a:latin typeface="Yu Gothic UI"/>
+            </a:endParaRPr>
+          </a:p>
+          <a:p>
+            <a:pPr algn="l"/>
+            <a:r>
+              <a:rPr sz="1200" b="0">
+                <a:solidFill>
+                  <a:srgbClr val="212529"/>
+                </a:solidFill>
+                <a:latin typeface="Yu Gothic UI"/>
+              </a:rPr>
+              <a:t>③ ツール (手足)</a:t>
+            </a:r>
+          </a:p>
+          <a:p>
+            <a:pPr algn="l"/>
+            <a:r>
+              <a:rPr sz="1200" b="0">
+                <a:solidFill>
+                  <a:srgbClr val="212529"/>
+                </a:solidFill>
+                <a:latin typeface="Yu Gothic UI"/>
+              </a:rPr>
+              <a:t>   Read / Write / Edit</a:t>
+            </a:r>
+          </a:p>
+          <a:p>
+            <a:pPr algn="l"/>
+            <a:r>
+              <a:rPr sz="1200" b="0">
+                <a:solidFill>
+                  <a:srgbClr val="212529"/>
+                </a:solidFill>
+                <a:latin typeface="Yu Gothic UI"/>
+              </a:rPr>
+              <a:t>   Bash / Web検索 / API呼び出し</a:t>
+            </a:r>
+          </a:p>
+          <a:p>
+            <a:pPr algn="l"/>
+            <a:endParaRPr sz="1200" b="0">
+              <a:solidFill>
+                <a:srgbClr val="212529"/>
+              </a:solidFill>
+              <a:latin typeface="Yu Gothic UI"/>
+            </a:endParaRPr>
+          </a:p>
+          <a:p>
+            <a:pPr algn="l"/>
+            <a:r>
+              <a:rPr sz="1200" b="0">
+                <a:solidFill>
+                  <a:srgbClr val="212529"/>
+                </a:solidFill>
+                <a:latin typeface="Yu Gothic UI"/>
+              </a:rPr>
+              <a:t>④ 実行ループ</a:t>
+            </a:r>
+          </a:p>
+          <a:p>
+            <a:pPr algn="l"/>
+            <a:r>
+              <a:rPr sz="1200" b="0">
+                <a:solidFill>
+                  <a:srgbClr val="212529"/>
+                </a:solidFill>
+                <a:latin typeface="Yu Gothic UI"/>
+              </a:rPr>
+              <a:t>   観察 → 思考 → 行動 → 観察 → ...</a:t>
+            </a:r>
+          </a:p>
+        </p:txBody>
+      </p:sp>
+      <p:sp>
+        <p:nvSpPr>
+          <p:cNvPr id="6" name="TextBox 5"/>
+          <p:cNvSpPr txBox="1"/>
+          <p:nvPr/>
+        </p:nvSpPr>
+        <p:spPr>
+          <a:xfrm>
+            <a:off x="5943600" y="1463040"/>
+            <a:ext cx="5852160" cy="365760"/>
+          </a:xfrm>
+          <a:prstGeom prst="rect">
+            <a:avLst/>
+          </a:prstGeom>
+          <a:noFill/>
+          <a:ln>
+            <a:noFill/>
+          </a:ln>
+        </p:spPr>
+        <p:txBody>
+          <a:bodyPr wrap="square" anchor="t">
+            <a:spAutoFit/>
+          </a:bodyPr>
+          <a:lstStyle/>
+          <a:p>
+            <a:pPr algn="l"/>
+            <a:r>
+              <a:rPr sz="1300" b="1">
+                <a:solidFill>
+                  <a:srgbClr val="2E86AB"/>
+                </a:solidFill>
+                <a:latin typeface="Yu Gothic UI"/>
+              </a:rPr>
+              <a:t>具体例: 「バグを直して」と指示された場合</a:t>
+            </a:r>
+          </a:p>
+        </p:txBody>
+      </p:sp>
+      <p:sp>
+        <p:nvSpPr>
+          <p:cNvPr id="7" name="TextBox 6"/>
+          <p:cNvSpPr txBox="1"/>
+          <p:nvPr/>
+        </p:nvSpPr>
+        <p:spPr>
+          <a:xfrm>
+            <a:off x="5943600" y="1828800"/>
+            <a:ext cx="822960" cy="914400"/>
+          </a:xfrm>
+          <a:prstGeom prst="rect">
+            <a:avLst/>
+          </a:prstGeom>
+          <a:solidFill>
+            <a:srgbClr val="2E86AB"/>
+          </a:solidFill>
+          <a:ln>
+            <a:solidFill>
+              <a:srgbClr val="2E86AB"/>
+            </a:solidFill>
+          </a:ln>
+        </p:spPr>
+        <p:txBody>
+          <a:bodyPr wrap="square" anchor="ctr">
+            <a:spAutoFit/>
+          </a:bodyPr>
+          <a:lstStyle/>
+          <a:p>
+            <a:pPr algn="ctr"/>
+            <a:r>
+              <a:rPr sz="1100" b="1">
+                <a:solidFill>
+                  <a:srgbClr val="FFFFFF"/>
+                </a:solidFill>
+                <a:latin typeface="Yu Gothic UI"/>
+              </a:rPr>
+              <a:t>Step 1</a:t>
+            </a:r>
+          </a:p>
+        </p:txBody>
+      </p:sp>
+      <p:sp>
+        <p:nvSpPr>
+          <p:cNvPr id="8" name="TextBox 7"/>
+          <p:cNvSpPr txBox="1"/>
+          <p:nvPr/>
+        </p:nvSpPr>
+        <p:spPr>
+          <a:xfrm>
+            <a:off x="6858000" y="1828800"/>
+            <a:ext cx="4937760" cy="914400"/>
+          </a:xfrm>
+          <a:prstGeom prst="rect">
+            <a:avLst/>
+          </a:prstGeom>
+          <a:solidFill>
+            <a:srgbClr val="F4F6F8"/>
+          </a:solidFill>
+          <a:ln>
+            <a:solidFill>
+              <a:srgbClr val="F4F6F8"/>
+            </a:solidFill>
+          </a:ln>
+        </p:spPr>
+        <p:txBody>
+          <a:bodyPr wrap="square" anchor="t">
+            <a:spAutoFit/>
+          </a:bodyPr>
+          <a:lstStyle/>
+          <a:p>
+            <a:pPr algn="l"/>
+            <a:r>
+              <a:rPr sz="1000" b="0">
+                <a:solidFill>
+                  <a:srgbClr val="212529"/>
+                </a:solidFill>
+                <a:latin typeface="Yu Gothic UI"/>
+              </a:rPr>
+              <a:t>観察: ユーザーから依頼</a:t>
+            </a:r>
+          </a:p>
+          <a:p>
+            <a:pPr algn="l"/>
+            <a:r>
+              <a:rPr sz="1000" b="0">
+                <a:solidFill>
+                  <a:srgbClr val="212529"/>
+                </a:solidFill>
+                <a:latin typeface="Yu Gothic UI"/>
+              </a:rPr>
+              <a:t>思考: エラーを確認しよう</a:t>
+            </a:r>
+          </a:p>
+          <a:p>
+            <a:pPr algn="l"/>
+            <a:r>
+              <a:rPr sz="1000" b="0">
+                <a:solidFill>
+                  <a:srgbClr val="212529"/>
+                </a:solidFill>
+                <a:latin typeface="Yu Gothic UI"/>
+              </a:rPr>
+              <a:t>行動: Bash("npm test")</a:t>
+            </a:r>
+          </a:p>
+        </p:txBody>
+      </p:sp>
+      <p:sp>
+        <p:nvSpPr>
+          <p:cNvPr id="9" name="TextBox 8"/>
+          <p:cNvSpPr txBox="1"/>
+          <p:nvPr/>
+        </p:nvSpPr>
+        <p:spPr>
+          <a:xfrm>
+            <a:off x="5943600" y="2880360"/>
+            <a:ext cx="822960" cy="914400"/>
+          </a:xfrm>
+          <a:prstGeom prst="rect">
+            <a:avLst/>
+          </a:prstGeom>
+          <a:solidFill>
+            <a:srgbClr val="2E86AB"/>
+          </a:solidFill>
+          <a:ln>
+            <a:solidFill>
+              <a:srgbClr val="2E86AB"/>
+            </a:solidFill>
+          </a:ln>
+        </p:spPr>
+        <p:txBody>
+          <a:bodyPr wrap="square" anchor="ctr">
+            <a:spAutoFit/>
+          </a:bodyPr>
+          <a:lstStyle/>
+          <a:p>
+            <a:pPr algn="ctr"/>
+            <a:r>
+              <a:rPr sz="1100" b="1">
+                <a:solidFill>
+                  <a:srgbClr val="FFFFFF"/>
+                </a:solidFill>
+                <a:latin typeface="Yu Gothic UI"/>
+              </a:rPr>
+              <a:t>Step 2</a:t>
+            </a:r>
+          </a:p>
+        </p:txBody>
+      </p:sp>
+      <p:sp>
+        <p:nvSpPr>
+          <p:cNvPr id="10" name="TextBox 9"/>
+          <p:cNvSpPr txBox="1"/>
+          <p:nvPr/>
+        </p:nvSpPr>
+        <p:spPr>
+          <a:xfrm>
+            <a:off x="6858000" y="2880360"/>
+            <a:ext cx="4937760" cy="914400"/>
+          </a:xfrm>
+          <a:prstGeom prst="rect">
+            <a:avLst/>
+          </a:prstGeom>
+          <a:solidFill>
+            <a:srgbClr val="F4F6F8"/>
+          </a:solidFill>
+          <a:ln>
+            <a:solidFill>
+              <a:srgbClr val="F4F6F8"/>
+            </a:solidFill>
+          </a:ln>
+        </p:spPr>
+        <p:txBody>
+          <a:bodyPr wrap="square" anchor="t">
+            <a:spAutoFit/>
+          </a:bodyPr>
+          <a:lstStyle/>
+          <a:p>
+            <a:pPr algn="l"/>
+            <a:r>
+              <a:rPr sz="1000" b="0">
+                <a:solidFill>
+                  <a:srgbClr val="212529"/>
+                </a:solidFill>
+                <a:latin typeface="Yu Gothic UI"/>
+              </a:rPr>
+              <a:t>観察: auth.spec.js 失敗 "token undefined"</a:t>
+            </a:r>
+          </a:p>
+          <a:p>
+            <a:pPr algn="l"/>
+            <a:r>
+              <a:rPr sz="1000" b="0">
+                <a:solidFill>
+                  <a:srgbClr val="212529"/>
+                </a:solidFill>
+                <a:latin typeface="Yu Gothic UI"/>
+              </a:rPr>
+              <a:t>思考: auth.js が怪しい</a:t>
+            </a:r>
+          </a:p>
+          <a:p>
+            <a:pPr algn="l"/>
+            <a:r>
+              <a:rPr sz="1000" b="0">
+                <a:solidFill>
+                  <a:srgbClr val="212529"/>
+                </a:solidFill>
+                <a:latin typeface="Yu Gothic UI"/>
+              </a:rPr>
+              <a:t>行動: Read("src/auth.js")</a:t>
+            </a:r>
+          </a:p>
+        </p:txBody>
+      </p:sp>
+      <p:sp>
+        <p:nvSpPr>
+          <p:cNvPr id="11" name="TextBox 10"/>
+          <p:cNvSpPr txBox="1"/>
+          <p:nvPr/>
+        </p:nvSpPr>
+        <p:spPr>
+          <a:xfrm>
+            <a:off x="5943600" y="3931920"/>
+            <a:ext cx="822960" cy="914400"/>
+          </a:xfrm>
+          <a:prstGeom prst="rect">
+            <a:avLst/>
+          </a:prstGeom>
+          <a:solidFill>
+            <a:srgbClr val="2E86AB"/>
+          </a:solidFill>
+          <a:ln>
+            <a:solidFill>
+              <a:srgbClr val="2E86AB"/>
+            </a:solidFill>
+          </a:ln>
+        </p:spPr>
+        <p:txBody>
+          <a:bodyPr wrap="square" anchor="ctr">
+            <a:spAutoFit/>
+          </a:bodyPr>
+          <a:lstStyle/>
+          <a:p>
+            <a:pPr algn="ctr"/>
+            <a:r>
+              <a:rPr sz="1100" b="1">
+                <a:solidFill>
+                  <a:srgbClr val="FFFFFF"/>
+                </a:solidFill>
+                <a:latin typeface="Yu Gothic UI"/>
+              </a:rPr>
+              <a:t>Step 3</a:t>
+            </a:r>
+          </a:p>
+        </p:txBody>
+      </p:sp>
+      <p:sp>
+        <p:nvSpPr>
+          <p:cNvPr id="12" name="TextBox 11"/>
+          <p:cNvSpPr txBox="1"/>
+          <p:nvPr/>
+        </p:nvSpPr>
+        <p:spPr>
+          <a:xfrm>
+            <a:off x="6858000" y="3931920"/>
+            <a:ext cx="4937760" cy="914400"/>
+          </a:xfrm>
+          <a:prstGeom prst="rect">
+            <a:avLst/>
+          </a:prstGeom>
+          <a:solidFill>
+            <a:srgbClr val="F4F6F8"/>
+          </a:solidFill>
+          <a:ln>
+            <a:solidFill>
+              <a:srgbClr val="F4F6F8"/>
+            </a:solidFill>
+          </a:ln>
+        </p:spPr>
+        <p:txBody>
+          <a:bodyPr wrap="square" anchor="t">
+            <a:spAutoFit/>
+          </a:bodyPr>
+          <a:lstStyle/>
+          <a:p>
+            <a:pPr algn="l"/>
+            <a:r>
+              <a:rPr sz="1000" b="0">
+                <a:solidFill>
+                  <a:srgbClr val="212529"/>
+                </a:solidFill>
+                <a:latin typeface="Yu Gothic UI"/>
+              </a:rPr>
+              <a:t>観察: 15行目で process.env.TOKEN 未定義</a:t>
+            </a:r>
+          </a:p>
+          <a:p>
+            <a:pPr algn="l"/>
+            <a:r>
+              <a:rPr sz="1000" b="0">
+                <a:solidFill>
+                  <a:srgbClr val="212529"/>
+                </a:solidFill>
+                <a:latin typeface="Yu Gothic UI"/>
+              </a:rPr>
+              <a:t>思考: 修正しよう</a:t>
+            </a:r>
+          </a:p>
+          <a:p>
+            <a:pPr algn="l"/>
+            <a:r>
+              <a:rPr sz="1000" b="0">
+                <a:solidFill>
+                  <a:srgbClr val="212529"/>
+                </a:solidFill>
+                <a:latin typeface="Yu Gothic UI"/>
+              </a:rPr>
+              <a:t>行動: Edit("src/auth.js")</a:t>
+            </a:r>
+          </a:p>
+        </p:txBody>
+      </p:sp>
+      <p:sp>
+        <p:nvSpPr>
+          <p:cNvPr id="13" name="TextBox 12"/>
+          <p:cNvSpPr txBox="1"/>
+          <p:nvPr/>
+        </p:nvSpPr>
+        <p:spPr>
+          <a:xfrm>
+            <a:off x="5943600" y="4983480"/>
+            <a:ext cx="822960" cy="914400"/>
+          </a:xfrm>
+          <a:prstGeom prst="rect">
+            <a:avLst/>
+          </a:prstGeom>
+          <a:solidFill>
+            <a:srgbClr val="2E86AB"/>
+          </a:solidFill>
+          <a:ln>
+            <a:solidFill>
+              <a:srgbClr val="2E86AB"/>
+            </a:solidFill>
+          </a:ln>
+        </p:spPr>
+        <p:txBody>
+          <a:bodyPr wrap="square" anchor="ctr">
+            <a:spAutoFit/>
+          </a:bodyPr>
+          <a:lstStyle/>
+          <a:p>
+            <a:pPr algn="ctr"/>
+            <a:r>
+              <a:rPr sz="1100" b="1">
+                <a:solidFill>
+                  <a:srgbClr val="FFFFFF"/>
+                </a:solidFill>
+                <a:latin typeface="Yu Gothic UI"/>
+              </a:rPr>
+              <a:t>Step 4</a:t>
+            </a:r>
+          </a:p>
+        </p:txBody>
+      </p:sp>
+      <p:sp>
+        <p:nvSpPr>
+          <p:cNvPr id="14" name="TextBox 13"/>
+          <p:cNvSpPr txBox="1"/>
+          <p:nvPr/>
+        </p:nvSpPr>
+        <p:spPr>
+          <a:xfrm>
+            <a:off x="6858000" y="4983480"/>
+            <a:ext cx="4937760" cy="914400"/>
+          </a:xfrm>
+          <a:prstGeom prst="rect">
+            <a:avLst/>
+          </a:prstGeom>
+          <a:solidFill>
+            <a:srgbClr val="F4F6F8"/>
+          </a:solidFill>
+          <a:ln>
+            <a:solidFill>
+              <a:srgbClr val="F4F6F8"/>
+            </a:solidFill>
+          </a:ln>
+        </p:spPr>
+        <p:txBody>
+          <a:bodyPr wrap="square" anchor="t">
+            <a:spAutoFit/>
+          </a:bodyPr>
+          <a:lstStyle/>
+          <a:p>
+            <a:pPr algn="l"/>
+            <a:r>
+              <a:rPr sz="1000" b="0">
+                <a:solidFill>
+                  <a:srgbClr val="212529"/>
+                </a:solidFill>
+                <a:latin typeface="Yu Gothic UI"/>
+              </a:rPr>
+              <a:t>観察: 編集完了</a:t>
+            </a:r>
+          </a:p>
+          <a:p>
+            <a:pPr algn="l"/>
+            <a:r>
+              <a:rPr sz="1000" b="0">
+                <a:solidFill>
+                  <a:srgbClr val="212529"/>
+                </a:solidFill>
+                <a:latin typeface="Yu Gothic UI"/>
+              </a:rPr>
+              <a:t>思考: テスト再実行で確認</a:t>
+            </a:r>
+          </a:p>
+          <a:p>
+            <a:pPr algn="l"/>
+            <a:r>
+              <a:rPr sz="1000" b="0">
+                <a:solidFill>
+                  <a:srgbClr val="212529"/>
+                </a:solidFill>
+                <a:latin typeface="Yu Gothic UI"/>
+              </a:rPr>
+              <a:t>行動: Bash("npm test") → 成功</a:t>
+            </a:r>
+          </a:p>
+        </p:txBody>
+      </p:sp>
+      <p:sp>
+        <p:nvSpPr>
+          <p:cNvPr id="15" name="TextBox 14"/>
+          <p:cNvSpPr txBox="1"/>
+          <p:nvPr/>
+        </p:nvSpPr>
+        <p:spPr>
+          <a:xfrm>
+            <a:off x="365760" y="6400800"/>
+            <a:ext cx="11430000" cy="274320"/>
+          </a:xfrm>
+          <a:prstGeom prst="rect">
+            <a:avLst/>
+          </a:prstGeom>
+          <a:noFill/>
+          <a:ln>
+            <a:noFill/>
+          </a:ln>
+        </p:spPr>
+        <p:txBody>
+          <a:bodyPr wrap="square" anchor="t">
+            <a:spAutoFit/>
+          </a:bodyPr>
+          <a:lstStyle/>
+          <a:p>
+            <a:pPr algn="l"/>
+            <a:r>
+              <a:rPr sz="900" b="0">
+                <a:solidFill>
+                  <a:srgbClr val="6C757D"/>
+                </a:solidFill>
+                <a:latin typeface="Yu Gothic UI"/>
+              </a:rPr>
+              <a:t>AIタスクフォース 成果報告  |  Claude Code 成熟度レベル比較  |  p.15</a:t>
+            </a:r>
+          </a:p>
+        </p:txBody>
+      </p:sp>
+    </p:spTree>
+  </p:cSld>
+  <p:clrMapOvr>
+    <a:masterClrMapping/>
+  </p:clrMapOvr>
+</p:sld>
+</file>
+
+<file path=ppt/slides/slide14.xml><?xml version="1.0" encoding="utf-8"?>
+<p:sld xmlns:a="http://schemas.openxmlformats.org/drawingml/2006/main" xmlns:r="http://schemas.openxmlformats.org/officeDocument/2006/relationships" xmlns:p="http://schemas.openxmlformats.org/presentationml/2006/main">
+  <p:cSld>
+    <p:spTree>
+      <p:nvGrpSpPr>
+        <p:cNvPr id="1" name=""/>
+        <p:cNvGrpSpPr/>
+        <p:nvPr/>
+      </p:nvGrpSpPr>
+      <p:grpSpPr>
+        <a:xfrm>
+          <a:off x="0" y="0"/>
+          <a:ext cx="0" cy="0"/>
+          <a:chOff x="0" y="0"/>
+          <a:chExt cx="0" cy="0"/>
+        </a:xfrm>
+      </p:grpSpPr>
+      <p:sp>
+        <p:nvSpPr>
+          <p:cNvPr id="2" name="TextBox 1"/>
+          <p:cNvSpPr txBox="1"/>
+          <p:nvPr/>
+        </p:nvSpPr>
+        <p:spPr>
+          <a:xfrm>
+            <a:off x="365760" y="274320"/>
+            <a:ext cx="11430000" cy="640080"/>
+          </a:xfrm>
+          <a:prstGeom prst="rect">
+            <a:avLst/>
+          </a:prstGeom>
+          <a:noFill/>
+          <a:ln>
+            <a:noFill/>
+          </a:ln>
+        </p:spPr>
+        <p:txBody>
+          <a:bodyPr wrap="square" anchor="t">
+            <a:spAutoFit/>
+          </a:bodyPr>
+          <a:lstStyle/>
+          <a:p>
+            <a:pPr algn="l"/>
+            <a:r>
+              <a:rPr sz="2600" b="1">
+                <a:solidFill>
+                  <a:srgbClr val="1F3A5F"/>
+                </a:solidFill>
+                <a:latin typeface="Yu Gothic UI"/>
+              </a:rPr>
+              <a:t>補足③: 主要 AI コーディングエージェント比較</a:t>
+            </a:r>
+          </a:p>
+        </p:txBody>
+      </p:sp>
+      <p:sp>
+        <p:nvSpPr>
+          <p:cNvPr id="3" name="TextBox 2"/>
+          <p:cNvSpPr txBox="1"/>
+          <p:nvPr/>
+        </p:nvSpPr>
+        <p:spPr>
+          <a:xfrm>
+            <a:off x="365760" y="914400"/>
+            <a:ext cx="11430000" cy="365760"/>
+          </a:xfrm>
+          <a:prstGeom prst="rect">
+            <a:avLst/>
+          </a:prstGeom>
+          <a:noFill/>
+          <a:ln>
+            <a:noFill/>
+          </a:ln>
+        </p:spPr>
+        <p:txBody>
+          <a:bodyPr wrap="square" anchor="t">
+            <a:spAutoFit/>
+          </a:bodyPr>
+          <a:lstStyle/>
+          <a:p>
+            <a:pPr algn="l"/>
+            <a:r>
+              <a:rPr sz="1400" b="0">
+                <a:solidFill>
+                  <a:srgbClr val="6C757D"/>
+                </a:solidFill>
+                <a:latin typeface="Yu Gothic UI"/>
+              </a:rPr>
+              <a:t>Hooks + Subagents を両立しているのは Claude Code のみ (2026年4月時点)</a:t>
+            </a:r>
+          </a:p>
+        </p:txBody>
+      </p:sp>
+      <p:graphicFrame>
+        <p:nvGraphicFramePr>
+          <p:cNvPr id="4" name="Table 3"/>
+          <p:cNvGraphicFramePr>
+            <a:graphicFrameLocks noGrp="1"/>
+          </p:cNvGraphicFramePr>
+          <p:nvPr/>
+        </p:nvGraphicFramePr>
+        <p:xfrm>
+          <a:off x="365760" y="1463040"/>
+          <a:ext cx="11430000" cy="3200400"/>
+        </p:xfrm>
+        <a:graphic>
+          <a:graphicData uri="http://schemas.openxmlformats.org/drawingml/2006/table">
+            <a:tbl>
+              <a:tblPr firstRow="1" bandRow="1">
+                <a:tableStyleId>{5C22544A-7EE6-4342-B048-85BDC9FD1C3A}</a:tableStyleId>
+              </a:tblPr>
+              <a:tblGrid>
+                <a:gridCol w="1645920">
+                  <a:extLst>
+                    <a:ext uri="{9D8B030D-6E8A-4147-A177-3AD203B41FA5}">
+                      <a16:colId xmlns:a16="http://schemas.microsoft.com/office/drawing/2014/main" val="20000"/>
+                    </a:ext>
+                  </a:extLst>
+                </a:gridCol>
+                <a:gridCol w="1371600">
+                  <a:extLst>
+                    <a:ext uri="{9D8B030D-6E8A-4147-A177-3AD203B41FA5}">
+                      <a16:colId xmlns:a16="http://schemas.microsoft.com/office/drawing/2014/main" val="20001"/>
+                    </a:ext>
+                  </a:extLst>
+                </a:gridCol>
+                <a:gridCol w="1737360">
+                  <a:extLst>
+                    <a:ext uri="{9D8B030D-6E8A-4147-A177-3AD203B41FA5}">
+                      <a16:colId xmlns:a16="http://schemas.microsoft.com/office/drawing/2014/main" val="20002"/>
+                    </a:ext>
+                  </a:extLst>
+                </a:gridCol>
+                <a:gridCol w="2103120">
+                  <a:extLst>
+                    <a:ext uri="{9D8B030D-6E8A-4147-A177-3AD203B41FA5}">
+                      <a16:colId xmlns:a16="http://schemas.microsoft.com/office/drawing/2014/main" val="20003"/>
+                    </a:ext>
+                  </a:extLst>
+                </a:gridCol>
+                <a:gridCol w="1828800">
+                  <a:extLst>
+                    <a:ext uri="{9D8B030D-6E8A-4147-A177-3AD203B41FA5}">
+                      <a16:colId xmlns:a16="http://schemas.microsoft.com/office/drawing/2014/main" val="20004"/>
+                    </a:ext>
+                  </a:extLst>
+                </a:gridCol>
+                <a:gridCol w="2743200">
+                  <a:extLst>
+                    <a:ext uri="{9D8B030D-6E8A-4147-A177-3AD203B41FA5}">
+                      <a16:colId xmlns:a16="http://schemas.microsoft.com/office/drawing/2014/main" val="20005"/>
+                    </a:ext>
+                  </a:extLst>
+                </a:gridCol>
+              </a:tblGrid>
+              <a:tr h="457200">
+                <a:tc>
+                  <a:txBody>
+                    <a:bodyPr/>
+                    <a:lstStyle/>
+                    <a:p>
+                      <a:r>
+                        <a:rPr sz="1100" b="1">
+                          <a:solidFill>
+                            <a:srgbClr val="FFFFFF"/>
+                          </a:solidFill>
+                          <a:latin typeface="Yu Gothic UI"/>
+                        </a:rPr>
+                        <a:t>エージェント</a:t>
+                      </a:r>
+                    </a:p>
+                  </a:txBody>
+                  <a:tcPr>
+                    <a:solidFill>
+                      <a:srgbClr val="1F3A5F"/>
+                    </a:solidFill>
+                  </a:tcPr>
+                </a:tc>
+                <a:tc>
+                  <a:txBody>
+                    <a:bodyPr/>
+                    <a:lstStyle/>
+                    <a:p>
+                      <a:r>
+                        <a:rPr sz="1100" b="1">
+                          <a:solidFill>
+                            <a:srgbClr val="FFFFFF"/>
+                          </a:solidFill>
+                          <a:latin typeface="Yu Gothic UI"/>
+                        </a:rPr>
+                        <a:t>提供元</a:t>
+                      </a:r>
+                    </a:p>
+                  </a:txBody>
+                  <a:tcPr>
+                    <a:solidFill>
+                      <a:srgbClr val="1F3A5F"/>
+                    </a:solidFill>
+                  </a:tcPr>
+                </a:tc>
+                <a:tc>
+                  <a:txBody>
+                    <a:bodyPr/>
+                    <a:lstStyle/>
+                    <a:p>
+                      <a:r>
+                        <a:rPr sz="1100" b="1">
+                          <a:solidFill>
+                            <a:srgbClr val="FFFFFF"/>
+                          </a:solidFill>
+                          <a:latin typeface="Yu Gothic UI"/>
+                        </a:rPr>
+                        <a:t>ルール定義</a:t>
+                      </a:r>
+                    </a:p>
+                  </a:txBody>
+                  <a:tcPr>
+                    <a:solidFill>
+                      <a:srgbClr val="1F3A5F"/>
+                    </a:solidFill>
+                  </a:tcPr>
+                </a:tc>
+                <a:tc>
+                  <a:txBody>
+                    <a:bodyPr/>
+                    <a:lstStyle/>
+                    <a:p>
+                      <a:r>
+                        <a:rPr sz="1100" b="1">
+                          <a:solidFill>
+                            <a:srgbClr val="FFFFFF"/>
+                          </a:solidFill>
+                          <a:latin typeface="Yu Gothic UI"/>
+                        </a:rPr>
+                        <a:t>オンデマンド手順</a:t>
+                      </a:r>
+                    </a:p>
+                  </a:txBody>
+                  <a:tcPr>
+                    <a:solidFill>
+                      <a:srgbClr val="1F3A5F"/>
+                    </a:solidFill>
+                  </a:tcPr>
+                </a:tc>
+                <a:tc>
+                  <a:txBody>
+                    <a:bodyPr/>
+                    <a:lstStyle/>
+                    <a:p>
+                      <a:r>
+                        <a:rPr sz="1100" b="1">
+                          <a:solidFill>
+                            <a:srgbClr val="FFFFFF"/>
+                          </a:solidFill>
+                          <a:latin typeface="Yu Gothic UI"/>
+                        </a:rPr>
+                        <a:t>自動化Hook</a:t>
+                      </a:r>
+                    </a:p>
+                  </a:txBody>
+                  <a:tcPr>
+                    <a:solidFill>
+                      <a:srgbClr val="1F3A5F"/>
+                    </a:solidFill>
+                  </a:tcPr>
+                </a:tc>
+                <a:tc>
+                  <a:txBody>
+                    <a:bodyPr/>
+                    <a:lstStyle/>
+                    <a:p>
+                      <a:r>
+                        <a:rPr sz="1100" b="1">
+                          <a:solidFill>
+                            <a:srgbClr val="FFFFFF"/>
+                          </a:solidFill>
+                          <a:latin typeface="Yu Gothic UI"/>
+                        </a:rPr>
+                        <a:t>サブエージェント</a:t>
+                      </a:r>
+                    </a:p>
+                  </a:txBody>
+                  <a:tcPr>
+                    <a:solidFill>
+                      <a:srgbClr val="1F3A5F"/>
+                    </a:solidFill>
+                  </a:tcPr>
+                </a:tc>
+                <a:extLst>
+                  <a:ext uri="{0D108BD9-81ED-4DB2-BD59-A6C34878D82A}">
+                    <a16:rowId xmlns:a16="http://schemas.microsoft.com/office/drawing/2014/main" val="10000"/>
+                  </a:ext>
+                </a:extLst>
+              </a:tr>
+              <a:tr h="457200">
+                <a:tc>
+                  <a:txBody>
+                    <a:bodyPr/>
+                    <a:lstStyle/>
+                    <a:p>
+                      <a:r>
+                        <a:rPr sz="1000" b="1">
+                          <a:solidFill>
+                            <a:srgbClr val="212529"/>
+                          </a:solidFill>
+                          <a:latin typeface="Yu Gothic UI"/>
+                        </a:rPr>
+                        <a:t>Claude Code</a:t>
+                      </a:r>
+                    </a:p>
+                  </a:txBody>
+                  <a:tcPr>
+                    <a:solidFill>
+                      <a:srgbClr val="FFF4CC"/>
+                    </a:solidFill>
+                  </a:tcPr>
+                </a:tc>
+                <a:tc>
+                  <a:txBody>
+                    <a:bodyPr/>
+                    <a:lstStyle/>
+                    <a:p>
+                      <a:r>
+                        <a:rPr sz="1000" b="1">
+                          <a:solidFill>
+                            <a:srgbClr val="212529"/>
+                          </a:solidFill>
+                          <a:latin typeface="Yu Gothic UI"/>
+                        </a:rPr>
+                        <a:t>Anthropic</a:t>
+                      </a:r>
+                    </a:p>
+                  </a:txBody>
+                  <a:tcPr>
+                    <a:solidFill>
+                      <a:srgbClr val="FFF4CC"/>
+                    </a:solidFill>
+                  </a:tcPr>
+                </a:tc>
+                <a:tc>
+                  <a:txBody>
+                    <a:bodyPr/>
+                    <a:lstStyle/>
+                    <a:p>
+                      <a:r>
+                        <a:rPr sz="1000" b="1">
+                          <a:solidFill>
+                            <a:srgbClr val="212529"/>
+                          </a:solidFill>
+                          <a:latin typeface="Yu Gothic UI"/>
+                        </a:rPr>
+                        <a:t>CLAUDE.md</a:t>
+                      </a:r>
+                    </a:p>
+                  </a:txBody>
+                  <a:tcPr>
+                    <a:solidFill>
+                      <a:srgbClr val="FFF4CC"/>
+                    </a:solidFill>
+                  </a:tcPr>
+                </a:tc>
+                <a:tc>
+                  <a:txBody>
+                    <a:bodyPr/>
+                    <a:lstStyle/>
+                    <a:p>
+                      <a:r>
+                        <a:rPr sz="1000" b="1">
+                          <a:solidFill>
+                            <a:srgbClr val="212529"/>
+                          </a:solidFill>
+                          <a:latin typeface="Yu Gothic UI"/>
+                        </a:rPr>
+                        <a:t>Skills / Commands</a:t>
+                      </a:r>
+                    </a:p>
+                  </a:txBody>
+                  <a:tcPr>
+                    <a:solidFill>
+                      <a:srgbClr val="FFF4CC"/>
+                    </a:solidFill>
+                  </a:tcPr>
+                </a:tc>
+                <a:tc>
+                  <a:txBody>
+                    <a:bodyPr/>
+                    <a:lstStyle/>
+                    <a:p>
+                      <a:r>
+                        <a:rPr sz="1000" b="1">
+                          <a:solidFill>
+                            <a:srgbClr val="212529"/>
+                          </a:solidFill>
+                          <a:latin typeface="Yu Gothic UI"/>
+                        </a:rPr>
+                        <a:t>Hooks (強力)</a:t>
+                      </a:r>
+                    </a:p>
+                  </a:txBody>
+                  <a:tcPr>
+                    <a:solidFill>
+                      <a:srgbClr val="FFF4CC"/>
+                    </a:solidFill>
+                  </a:tcPr>
+                </a:tc>
+                <a:tc>
+                  <a:txBody>
+                    <a:bodyPr/>
+                    <a:lstStyle/>
+                    <a:p>
+                      <a:r>
+                        <a:rPr sz="1000" b="1">
+                          <a:solidFill>
+                            <a:srgbClr val="212529"/>
+                          </a:solidFill>
+                          <a:latin typeface="Yu Gothic UI"/>
+                        </a:rPr>
+                        <a:t>Subagents (並列)</a:t>
+                      </a:r>
+                    </a:p>
+                  </a:txBody>
+                  <a:tcPr>
+                    <a:solidFill>
+                      <a:srgbClr val="FFF4CC"/>
+                    </a:solidFill>
+                  </a:tcPr>
+                </a:tc>
+                <a:extLst>
+                  <a:ext uri="{0D108BD9-81ED-4DB2-BD59-A6C34878D82A}">
+                    <a16:rowId xmlns:a16="http://schemas.microsoft.com/office/drawing/2014/main" val="10001"/>
+                  </a:ext>
+                </a:extLst>
+              </a:tr>
+              <a:tr h="457200">
+                <a:tc>
+                  <a:txBody>
+                    <a:bodyPr/>
+                    <a:lstStyle/>
+                    <a:p>
+                      <a:r>
+                        <a:rPr sz="1000">
+                          <a:solidFill>
+                            <a:srgbClr val="212529"/>
+                          </a:solidFill>
+                          <a:latin typeface="Yu Gothic UI"/>
+                        </a:rPr>
+                        <a:t>Cursor</a:t>
+                      </a:r>
+                    </a:p>
+                  </a:txBody>
+                  <a:tcPr/>
+                </a:tc>
+                <a:tc>
+                  <a:txBody>
+                    <a:bodyPr/>
+                    <a:lstStyle/>
+                    <a:p>
+                      <a:r>
+                        <a:rPr sz="1000">
+                          <a:solidFill>
+                            <a:srgbClr val="212529"/>
+                          </a:solidFill>
+                          <a:latin typeface="Yu Gothic UI"/>
+                        </a:rPr>
+                        <a:t>Anysphere</a:t>
+                      </a:r>
+                    </a:p>
+                  </a:txBody>
+                  <a:tcPr/>
+                </a:tc>
+                <a:tc>
+                  <a:txBody>
+                    <a:bodyPr/>
+                    <a:lstStyle/>
+                    <a:p>
+                      <a:r>
+                        <a:rPr sz="1000">
+                          <a:solidFill>
+                            <a:srgbClr val="212529"/>
+                          </a:solidFill>
+                          <a:latin typeface="Yu Gothic UI"/>
+                        </a:rPr>
+                        <a:t>.cursorrules</a:t>
+                      </a:r>
+                    </a:p>
+                  </a:txBody>
+                  <a:tcPr/>
+                </a:tc>
+                <a:tc>
+                  <a:txBody>
+                    <a:bodyPr/>
+                    <a:lstStyle/>
+                    <a:p>
+                      <a:r>
+                        <a:rPr sz="1000">
+                          <a:solidFill>
+                            <a:srgbClr val="212529"/>
+                          </a:solidFill>
+                          <a:latin typeface="Yu Gothic UI"/>
+                        </a:rPr>
+                        <a:t>Custom Modes</a:t>
+                      </a:r>
+                    </a:p>
+                  </a:txBody>
+                  <a:tcPr/>
+                </a:tc>
+                <a:tc>
+                  <a:txBody>
+                    <a:bodyPr/>
+                    <a:lstStyle/>
+                    <a:p>
+                      <a:r>
+                        <a:rPr sz="1000">
+                          <a:solidFill>
+                            <a:srgbClr val="212529"/>
+                          </a:solidFill>
+                          <a:latin typeface="Yu Gothic UI"/>
+                        </a:rPr>
+                        <a:t>—</a:t>
+                      </a:r>
+                    </a:p>
+                  </a:txBody>
+                  <a:tcPr/>
+                </a:tc>
+                <a:tc>
+                  <a:txBody>
+                    <a:bodyPr/>
+                    <a:lstStyle/>
+                    <a:p>
+                      <a:r>
+                        <a:rPr sz="1000">
+                          <a:solidFill>
+                            <a:srgbClr val="212529"/>
+                          </a:solidFill>
+                          <a:latin typeface="Yu Gothic UI"/>
+                        </a:rPr>
+                        <a:t>Background (限定)</a:t>
+                      </a:r>
+                    </a:p>
+                  </a:txBody>
+                  <a:tcPr/>
+                </a:tc>
+                <a:extLst>
+                  <a:ext uri="{0D108BD9-81ED-4DB2-BD59-A6C34878D82A}">
+                    <a16:rowId xmlns:a16="http://schemas.microsoft.com/office/drawing/2014/main" val="10002"/>
+                  </a:ext>
+                </a:extLst>
+              </a:tr>
+              <a:tr h="457200">
+                <a:tc>
+                  <a:txBody>
+                    <a:bodyPr/>
+                    <a:lstStyle/>
+                    <a:p>
+                      <a:r>
+                        <a:rPr sz="1000">
+                          <a:solidFill>
+                            <a:srgbClr val="212529"/>
+                          </a:solidFill>
+                          <a:latin typeface="Yu Gothic UI"/>
+                        </a:rPr>
+                        <a:t>GitHub Copilot</a:t>
+                      </a:r>
+                    </a:p>
+                  </a:txBody>
+                  <a:tcPr/>
+                </a:tc>
+                <a:tc>
+                  <a:txBody>
+                    <a:bodyPr/>
+                    <a:lstStyle/>
+                    <a:p>
+                      <a:r>
+                        <a:rPr sz="1000">
+                          <a:solidFill>
+                            <a:srgbClr val="212529"/>
+                          </a:solidFill>
+                          <a:latin typeface="Yu Gothic UI"/>
+                        </a:rPr>
+                        <a:t>GitHub/MS</a:t>
+                      </a:r>
+                    </a:p>
+                  </a:txBody>
+                  <a:tcPr/>
+                </a:tc>
+                <a:tc>
+                  <a:txBody>
+                    <a:bodyPr/>
+                    <a:lstStyle/>
+                    <a:p>
+                      <a:r>
+                        <a:rPr sz="1000">
+                          <a:solidFill>
+                            <a:srgbClr val="212529"/>
+                          </a:solidFill>
+                          <a:latin typeface="Yu Gothic UI"/>
+                        </a:rPr>
+                        <a:t>copilot-inst.</a:t>
+                      </a:r>
+                    </a:p>
+                  </a:txBody>
+                  <a:tcPr/>
+                </a:tc>
+                <a:tc>
+                  <a:txBody>
+                    <a:bodyPr/>
+                    <a:lstStyle/>
+                    <a:p>
+                      <a:r>
+                        <a:rPr sz="1000">
+                          <a:solidFill>
+                            <a:srgbClr val="212529"/>
+                          </a:solidFill>
+                          <a:latin typeface="Yu Gothic UI"/>
+                        </a:rPr>
+                        <a:t>Custom Instructions</a:t>
+                      </a:r>
+                    </a:p>
+                  </a:txBody>
+                  <a:tcPr/>
+                </a:tc>
+                <a:tc>
+                  <a:txBody>
+                    <a:bodyPr/>
+                    <a:lstStyle/>
+                    <a:p>
+                      <a:r>
+                        <a:rPr sz="1000">
+                          <a:solidFill>
+                            <a:srgbClr val="212529"/>
+                          </a:solidFill>
+                          <a:latin typeface="Yu Gothic UI"/>
+                        </a:rPr>
+                        <a:t>—</a:t>
+                      </a:r>
+                    </a:p>
+                  </a:txBody>
+                  <a:tcPr/>
+                </a:tc>
+                <a:tc>
+                  <a:txBody>
+                    <a:bodyPr/>
+                    <a:lstStyle/>
+                    <a:p>
+                      <a:r>
+                        <a:rPr sz="1000">
+                          <a:solidFill>
+                            <a:srgbClr val="212529"/>
+                          </a:solidFill>
+                          <a:latin typeface="Yu Gothic UI"/>
+                        </a:rPr>
+                        <a:t>Coding Agent (限定)</a:t>
+                      </a:r>
+                    </a:p>
+                  </a:txBody>
+                  <a:tcPr/>
+                </a:tc>
+                <a:extLst>
+                  <a:ext uri="{0D108BD9-81ED-4DB2-BD59-A6C34878D82A}">
+                    <a16:rowId xmlns:a16="http://schemas.microsoft.com/office/drawing/2014/main" val="10003"/>
+                  </a:ext>
+                </a:extLst>
+              </a:tr>
+              <a:tr h="457200">
+                <a:tc>
+                  <a:txBody>
+                    <a:bodyPr/>
+                    <a:lstStyle/>
+                    <a:p>
+                      <a:r>
+                        <a:rPr sz="1000">
+                          <a:solidFill>
+                            <a:srgbClr val="212529"/>
+                          </a:solidFill>
+                          <a:latin typeface="Yu Gothic UI"/>
+                        </a:rPr>
+                        <a:t>Windsurf</a:t>
+                      </a:r>
+                    </a:p>
+                  </a:txBody>
+                  <a:tcPr/>
+                </a:tc>
+                <a:tc>
+                  <a:txBody>
+                    <a:bodyPr/>
+                    <a:lstStyle/>
+                    <a:p>
+                      <a:r>
+                        <a:rPr sz="1000">
+                          <a:solidFill>
+                            <a:srgbClr val="212529"/>
+                          </a:solidFill>
+                          <a:latin typeface="Yu Gothic UI"/>
+                        </a:rPr>
+                        <a:t>Codeium</a:t>
+                      </a:r>
+                    </a:p>
+                  </a:txBody>
+                  <a:tcPr/>
+                </a:tc>
+                <a:tc>
+                  <a:txBody>
+                    <a:bodyPr/>
+                    <a:lstStyle/>
+                    <a:p>
+                      <a:r>
+                        <a:rPr sz="1000">
+                          <a:solidFill>
+                            <a:srgbClr val="212529"/>
+                          </a:solidFill>
+                          <a:latin typeface="Yu Gothic UI"/>
+                        </a:rPr>
+                        <a:t>.windsurfrules</a:t>
+                      </a:r>
+                    </a:p>
+                  </a:txBody>
+                  <a:tcPr/>
+                </a:tc>
+                <a:tc>
+                  <a:txBody>
+                    <a:bodyPr/>
+                    <a:lstStyle/>
+                    <a:p>
+                      <a:r>
+                        <a:rPr sz="1000">
+                          <a:solidFill>
+                            <a:srgbClr val="212529"/>
+                          </a:solidFill>
+                          <a:latin typeface="Yu Gothic UI"/>
+                        </a:rPr>
+                        <a:t>Workflows</a:t>
+                      </a:r>
+                    </a:p>
+                  </a:txBody>
+                  <a:tcPr/>
+                </a:tc>
+                <a:tc>
+                  <a:txBody>
+                    <a:bodyPr/>
+                    <a:lstStyle/>
+                    <a:p>
+                      <a:r>
+                        <a:rPr sz="1000">
+                          <a:solidFill>
+                            <a:srgbClr val="212529"/>
+                          </a:solidFill>
+                          <a:latin typeface="Yu Gothic UI"/>
+                        </a:rPr>
+                        <a:t>—</a:t>
+                      </a:r>
+                    </a:p>
+                  </a:txBody>
+                  <a:tcPr/>
+                </a:tc>
+                <a:tc>
+                  <a:txBody>
+                    <a:bodyPr/>
+                    <a:lstStyle/>
+                    <a:p>
+                      <a:r>
+                        <a:rPr sz="1000">
+                          <a:solidFill>
+                            <a:srgbClr val="212529"/>
+                          </a:solidFill>
+                          <a:latin typeface="Yu Gothic UI"/>
+                        </a:rPr>
+                        <a:t>Cascade</a:t>
+                      </a:r>
+                    </a:p>
+                  </a:txBody>
+                  <a:tcPr/>
+                </a:tc>
+                <a:extLst>
+                  <a:ext uri="{0D108BD9-81ED-4DB2-BD59-A6C34878D82A}">
+                    <a16:rowId xmlns:a16="http://schemas.microsoft.com/office/drawing/2014/main" val="10004"/>
+                  </a:ext>
+                </a:extLst>
+              </a:tr>
+              <a:tr h="457200">
+                <a:tc>
+                  <a:txBody>
+                    <a:bodyPr/>
+                    <a:lstStyle/>
+                    <a:p>
+                      <a:r>
+                        <a:rPr sz="1000">
+                          <a:solidFill>
+                            <a:srgbClr val="212529"/>
+                          </a:solidFill>
+                          <a:latin typeface="Yu Gothic UI"/>
+                        </a:rPr>
+                        <a:t>Aider</a:t>
+                      </a:r>
+                    </a:p>
+                  </a:txBody>
+                  <a:tcPr/>
+                </a:tc>
+                <a:tc>
+                  <a:txBody>
+                    <a:bodyPr/>
+                    <a:lstStyle/>
+                    <a:p>
+                      <a:r>
+                        <a:rPr sz="1000">
+                          <a:solidFill>
+                            <a:srgbClr val="212529"/>
+                          </a:solidFill>
+                          <a:latin typeface="Yu Gothic UI"/>
+                        </a:rPr>
+                        <a:t>OSS</a:t>
+                      </a:r>
+                    </a:p>
+                  </a:txBody>
+                  <a:tcPr/>
+                </a:tc>
+                <a:tc>
+                  <a:txBody>
+                    <a:bodyPr/>
+                    <a:lstStyle/>
+                    <a:p>
+                      <a:r>
+                        <a:rPr sz="1000">
+                          <a:solidFill>
+                            <a:srgbClr val="212529"/>
+                          </a:solidFill>
+                          <a:latin typeface="Yu Gothic UI"/>
+                        </a:rPr>
+                        <a:t>CONVENTIONS.md</a:t>
+                      </a:r>
+                    </a:p>
+                  </a:txBody>
+                  <a:tcPr/>
+                </a:tc>
+                <a:tc>
+                  <a:txBody>
+                    <a:bodyPr/>
+                    <a:lstStyle/>
+                    <a:p>
+                      <a:r>
+                        <a:rPr sz="1000">
+                          <a:solidFill>
+                            <a:srgbClr val="212529"/>
+                          </a:solidFill>
+                          <a:latin typeface="Yu Gothic UI"/>
+                        </a:rPr>
+                        <a:t>—</a:t>
+                      </a:r>
+                    </a:p>
+                  </a:txBody>
+                  <a:tcPr/>
+                </a:tc>
+                <a:tc>
+                  <a:txBody>
+                    <a:bodyPr/>
+                    <a:lstStyle/>
+                    <a:p>
+                      <a:r>
+                        <a:rPr sz="1000">
+                          <a:solidFill>
+                            <a:srgbClr val="212529"/>
+                          </a:solidFill>
+                          <a:latin typeface="Yu Gothic UI"/>
+                        </a:rPr>
+                        <a:t>—</a:t>
+                      </a:r>
+                    </a:p>
+                  </a:txBody>
+                  <a:tcPr/>
+                </a:tc>
+                <a:tc>
+                  <a:txBody>
+                    <a:bodyPr/>
+                    <a:lstStyle/>
+                    <a:p>
+                      <a:r>
+                        <a:rPr sz="1000">
+                          <a:solidFill>
+                            <a:srgbClr val="212529"/>
+                          </a:solidFill>
+                          <a:latin typeface="Yu Gothic UI"/>
+                        </a:rPr>
+                        <a:t>—</a:t>
+                      </a:r>
+                    </a:p>
+                  </a:txBody>
+                  <a:tcPr/>
+                </a:tc>
+                <a:extLst>
+                  <a:ext uri="{0D108BD9-81ED-4DB2-BD59-A6C34878D82A}">
+                    <a16:rowId xmlns:a16="http://schemas.microsoft.com/office/drawing/2014/main" val="10005"/>
+                  </a:ext>
+                </a:extLst>
+              </a:tr>
+              <a:tr h="457200">
+                <a:tc>
+                  <a:txBody>
+                    <a:bodyPr/>
+                    <a:lstStyle/>
+                    <a:p>
+                      <a:r>
+                        <a:rPr sz="1000">
+                          <a:solidFill>
+                            <a:srgbClr val="212529"/>
+                          </a:solidFill>
+                          <a:latin typeface="Yu Gothic UI"/>
+                        </a:rPr>
+                        <a:t>Cline</a:t>
+                      </a:r>
+                    </a:p>
+                  </a:txBody>
+                  <a:tcPr/>
+                </a:tc>
+                <a:tc>
+                  <a:txBody>
+                    <a:bodyPr/>
+                    <a:lstStyle/>
+                    <a:p>
+                      <a:r>
+                        <a:rPr sz="1000">
+                          <a:solidFill>
+                            <a:srgbClr val="212529"/>
+                          </a:solidFill>
+                          <a:latin typeface="Yu Gothic UI"/>
+                        </a:rPr>
+                        <a:t>OSS</a:t>
+                      </a:r>
+                    </a:p>
+                  </a:txBody>
+                  <a:tcPr/>
+                </a:tc>
+                <a:tc>
+                  <a:txBody>
+                    <a:bodyPr/>
+                    <a:lstStyle/>
+                    <a:p>
+                      <a:r>
+                        <a:rPr sz="1000">
+                          <a:solidFill>
+                            <a:srgbClr val="212529"/>
+                          </a:solidFill>
+                          <a:latin typeface="Yu Gothic UI"/>
+                        </a:rPr>
+                        <a:t>Custom Inst.</a:t>
+                      </a:r>
+                    </a:p>
+                  </a:txBody>
+                  <a:tcPr/>
+                </a:tc>
+                <a:tc>
+                  <a:txBody>
+                    <a:bodyPr/>
+                    <a:lstStyle/>
+                    <a:p>
+                      <a:r>
+                        <a:rPr sz="1000">
+                          <a:solidFill>
+                            <a:srgbClr val="212529"/>
+                          </a:solidFill>
+                          <a:latin typeface="Yu Gothic UI"/>
+                        </a:rPr>
+                        <a:t>—</a:t>
+                      </a:r>
+                    </a:p>
+                  </a:txBody>
+                  <a:tcPr/>
+                </a:tc>
+                <a:tc>
+                  <a:txBody>
+                    <a:bodyPr/>
+                    <a:lstStyle/>
+                    <a:p>
+                      <a:r>
+                        <a:rPr sz="1000">
+                          <a:solidFill>
+                            <a:srgbClr val="212529"/>
+                          </a:solidFill>
+                          <a:latin typeface="Yu Gothic UI"/>
+                        </a:rPr>
+                        <a:t>—</a:t>
+                      </a:r>
+                    </a:p>
+                  </a:txBody>
+                  <a:tcPr/>
+                </a:tc>
+                <a:tc>
+                  <a:txBody>
+                    <a:bodyPr/>
+                    <a:lstStyle/>
+                    <a:p>
+                      <a:r>
+                        <a:rPr sz="1000">
+                          <a:solidFill>
+                            <a:srgbClr val="212529"/>
+                          </a:solidFill>
+                          <a:latin typeface="Yu Gothic UI"/>
+                        </a:rPr>
+                        <a:t>—</a:t>
+                      </a:r>
+                    </a:p>
+                  </a:txBody>
+                  <a:tcPr/>
+                </a:tc>
+                <a:extLst>
+                  <a:ext uri="{0D108BD9-81ED-4DB2-BD59-A6C34878D82A}">
+                    <a16:rowId xmlns:a16="http://schemas.microsoft.com/office/drawing/2014/main" val="10006"/>
+                  </a:ext>
+                </a:extLst>
+              </a:tr>
+            </a:tbl>
+          </a:graphicData>
+        </a:graphic>
+      </p:graphicFrame>
+      <p:sp>
+        <p:nvSpPr>
+          <p:cNvPr id="5" name="TextBox 4"/>
+          <p:cNvSpPr txBox="1"/>
+          <p:nvPr/>
+        </p:nvSpPr>
+        <p:spPr>
+          <a:xfrm>
+            <a:off x="365760" y="4846320"/>
+            <a:ext cx="11430000" cy="1371600"/>
+          </a:xfrm>
+          <a:prstGeom prst="rect">
+            <a:avLst/>
+          </a:prstGeom>
+          <a:noFill/>
+          <a:ln>
+            <a:noFill/>
+          </a:ln>
+        </p:spPr>
+        <p:txBody>
+          <a:bodyPr wrap="square" anchor="t">
+            <a:spAutoFit/>
+          </a:bodyPr>
+          <a:lstStyle/>
+          <a:p>
+            <a:pPr algn="l"/>
+            <a:r>
+              <a:rPr sz="1300" b="1">
+                <a:solidFill>
+                  <a:srgbClr val="2E86AB"/>
+                </a:solidFill>
+                <a:latin typeface="Yu Gothic UI"/>
+              </a:rPr>
+              <a:t>ポイント</a:t>
+            </a:r>
+          </a:p>
+        </p:txBody>
+      </p:sp>
+      <p:sp>
+        <p:nvSpPr>
+          <p:cNvPr id="6" name="TextBox 5"/>
+          <p:cNvSpPr txBox="1"/>
+          <p:nvPr/>
+        </p:nvSpPr>
+        <p:spPr>
+          <a:xfrm>
+            <a:off x="365760" y="5212080"/>
+            <a:ext cx="11430000" cy="1188720"/>
+          </a:xfrm>
+          <a:prstGeom prst="rect">
+            <a:avLst/>
+          </a:prstGeom>
+          <a:noFill/>
+          <a:ln>
+            <a:noFill/>
+          </a:ln>
+        </p:spPr>
+        <p:txBody>
+          <a:bodyPr wrap="square" anchor="t">
+            <a:spAutoFit/>
+          </a:bodyPr>
+          <a:lstStyle/>
+          <a:p>
+            <a:pPr algn="l"/>
+            <a:r>
+              <a:rPr sz="1200" b="0">
+                <a:solidFill>
+                  <a:srgbClr val="212529"/>
+                </a:solidFill>
+                <a:latin typeface="Yu Gothic UI"/>
+              </a:rPr>
+              <a:t>・すべてのエージェントで「ルール定義」は可能 (Level 2 相当)</a:t>
+            </a:r>
+          </a:p>
+          <a:p>
+            <a:pPr algn="l"/>
+            <a:r>
+              <a:rPr sz="1200" b="0">
+                <a:solidFill>
+                  <a:srgbClr val="212529"/>
+                </a:solidFill>
+                <a:latin typeface="Yu Gothic UI"/>
+              </a:rPr>
+              <a:t>・「オンデマンド手順」対応は Claude Code / Cursor / Copilot / Windsurf (Level 3 相当)</a:t>
+            </a:r>
+          </a:p>
+          <a:p>
+            <a:pPr algn="l"/>
+            <a:r>
+              <a:rPr sz="1200" b="0">
+                <a:solidFill>
+                  <a:srgbClr val="212529"/>
+                </a:solidFill>
+                <a:latin typeface="Yu Gothic UI"/>
+              </a:rPr>
+              <a:t>・「Hook による自動化」を正式に持つのは現時点で Claude Code のみ (Level 4 相当)</a:t>
+            </a:r>
+          </a:p>
+          <a:p>
+            <a:pPr algn="l"/>
+            <a:r>
+              <a:rPr sz="1200" b="0">
+                <a:solidFill>
+                  <a:srgbClr val="212529"/>
+                </a:solidFill>
+                <a:latin typeface="Yu Gothic UI"/>
+              </a:rPr>
+              <a:t>・「並列サブエージェント」で独立レビューまでできるのも Claude Code の強み (Level 5 相当)</a:t>
+            </a:r>
+          </a:p>
+        </p:txBody>
+      </p:sp>
+      <p:sp>
+        <p:nvSpPr>
+          <p:cNvPr id="7" name="TextBox 6"/>
+          <p:cNvSpPr txBox="1"/>
+          <p:nvPr/>
+        </p:nvSpPr>
+        <p:spPr>
+          <a:xfrm>
+            <a:off x="365760" y="6400800"/>
+            <a:ext cx="11430000" cy="274320"/>
+          </a:xfrm>
+          <a:prstGeom prst="rect">
+            <a:avLst/>
+          </a:prstGeom>
+          <a:noFill/>
+          <a:ln>
+            <a:noFill/>
+          </a:ln>
+        </p:spPr>
+        <p:txBody>
+          <a:bodyPr wrap="square" anchor="t">
+            <a:spAutoFit/>
+          </a:bodyPr>
+          <a:lstStyle/>
+          <a:p>
+            <a:pPr algn="l"/>
+            <a:r>
+              <a:rPr sz="900" b="0">
+                <a:solidFill>
+                  <a:srgbClr val="6C757D"/>
+                </a:solidFill>
+                <a:latin typeface="Yu Gothic UI"/>
+              </a:rPr>
+              <a:t>AIタスクフォース 成果報告  |  Claude Code 成熟度レベル比較  |  p.16</a:t>
+            </a:r>
+          </a:p>
+        </p:txBody>
+      </p:sp>
+    </p:spTree>
+  </p:cSld>
+  <p:clrMapOvr>
+    <a:masterClrMapping/>
+  </p:clrMapOvr>
+</p:sld>
+</file>
+
+<file path=ppt/slides/slide15.xml><?xml version="1.0" encoding="utf-8"?>
+<p:sld xmlns:a="http://schemas.openxmlformats.org/drawingml/2006/main" xmlns:r="http://schemas.openxmlformats.org/officeDocument/2006/relationships" xmlns:p="http://schemas.openxmlformats.org/presentationml/2006/main">
+  <p:cSld>
+    <p:spTree>
+      <p:nvGrpSpPr>
+        <p:cNvPr id="1" name=""/>
+        <p:cNvGrpSpPr/>
+        <p:nvPr/>
+      </p:nvGrpSpPr>
+      <p:grpSpPr>
+        <a:xfrm>
+          <a:off x="0" y="0"/>
+          <a:ext cx="0" cy="0"/>
+          <a:chOff x="0" y="0"/>
+          <a:chExt cx="0" cy="0"/>
+        </a:xfrm>
+      </p:grpSpPr>
+      <p:sp>
+        <p:nvSpPr>
+          <p:cNvPr id="2" name="TextBox 1"/>
+          <p:cNvSpPr txBox="1"/>
+          <p:nvPr/>
+        </p:nvSpPr>
+        <p:spPr>
+          <a:xfrm>
+            <a:off x="365760" y="274320"/>
+            <a:ext cx="11430000" cy="640080"/>
+          </a:xfrm>
+          <a:prstGeom prst="rect">
+            <a:avLst/>
+          </a:prstGeom>
+          <a:noFill/>
+          <a:ln>
+            <a:noFill/>
+          </a:ln>
+        </p:spPr>
+        <p:txBody>
+          <a:bodyPr wrap="square" anchor="t">
+            <a:spAutoFit/>
+          </a:bodyPr>
+          <a:lstStyle/>
+          <a:p>
+            <a:pPr algn="l"/>
+            <a:r>
+              <a:rPr sz="2600" b="1">
+                <a:solidFill>
+                  <a:srgbClr val="1F3A5F"/>
+                </a:solidFill>
+                <a:latin typeface="Yu Gothic UI"/>
+              </a:rPr>
+              <a:t>補足④: 本資料の「成熟度レベル」の位置づけ</a:t>
+            </a:r>
+          </a:p>
+        </p:txBody>
+      </p:sp>
+      <p:sp>
+        <p:nvSpPr>
+          <p:cNvPr id="3" name="TextBox 2"/>
+          <p:cNvSpPr txBox="1"/>
+          <p:nvPr/>
+        </p:nvSpPr>
+        <p:spPr>
+          <a:xfrm>
+            <a:off x="365760" y="914400"/>
+            <a:ext cx="11430000" cy="365760"/>
+          </a:xfrm>
+          <a:prstGeom prst="rect">
+            <a:avLst/>
+          </a:prstGeom>
+          <a:noFill/>
+          <a:ln>
+            <a:noFill/>
+          </a:ln>
+        </p:spPr>
+        <p:txBody>
+          <a:bodyPr wrap="square" anchor="t">
+            <a:spAutoFit/>
+          </a:bodyPr>
+          <a:lstStyle/>
+          <a:p>
+            <a:pPr algn="l"/>
+            <a:r>
+              <a:rPr sz="1400" b="0">
+                <a:solidFill>
+                  <a:srgbClr val="6C757D"/>
+                </a:solidFill>
+                <a:latin typeface="Yu Gothic UI"/>
+              </a:rPr>
+              <a:t>⚠️ Anthropic公式ではなく、本プロジェクトで独自定義した段階導入フレームワーク</a:t>
+            </a:r>
+          </a:p>
+        </p:txBody>
+      </p:sp>
+      <p:sp>
+        <p:nvSpPr>
+          <p:cNvPr id="4" name="TextBox 3"/>
+          <p:cNvSpPr txBox="1"/>
+          <p:nvPr/>
+        </p:nvSpPr>
+        <p:spPr>
+          <a:xfrm>
+            <a:off x="365760" y="1463040"/>
+            <a:ext cx="11430000" cy="731520"/>
+          </a:xfrm>
+          <a:prstGeom prst="rect">
+            <a:avLst/>
+          </a:prstGeom>
+          <a:solidFill>
+            <a:srgbClr val="C0392B"/>
+          </a:solidFill>
+          <a:ln>
+            <a:solidFill>
+              <a:srgbClr val="C0392B"/>
+            </a:solidFill>
+          </a:ln>
+        </p:spPr>
+        <p:txBody>
+          <a:bodyPr wrap="square" anchor="ctr">
+            <a:spAutoFit/>
+          </a:bodyPr>
+          <a:lstStyle/>
+          <a:p>
+            <a:pPr algn="ctr"/>
+            <a:r>
+              <a:rPr sz="1300" b="1">
+                <a:solidFill>
+                  <a:srgbClr val="FFFFFF"/>
+                </a:solidFill>
+                <a:latin typeface="Yu Gothic UI"/>
+              </a:rPr>
+              <a:t>重要: 「Level 1〜5」は Anthropic 公式用語ではありません。本プロジェクト独自の整理です。</a:t>
+            </a:r>
+          </a:p>
+        </p:txBody>
+      </p:sp>
+      <p:sp>
+        <p:nvSpPr>
+          <p:cNvPr id="5" name="TextBox 4"/>
+          <p:cNvSpPr txBox="1"/>
+          <p:nvPr/>
+        </p:nvSpPr>
+        <p:spPr>
+          <a:xfrm>
+            <a:off x="365760" y="2468880"/>
+            <a:ext cx="5577840" cy="365760"/>
+          </a:xfrm>
+          <a:prstGeom prst="rect">
+            <a:avLst/>
+          </a:prstGeom>
+          <a:noFill/>
+          <a:ln>
+            <a:noFill/>
+          </a:ln>
+        </p:spPr>
+        <p:txBody>
+          <a:bodyPr wrap="square" anchor="t">
+            <a:spAutoFit/>
+          </a:bodyPr>
+          <a:lstStyle/>
+          <a:p>
+            <a:pPr algn="l"/>
+            <a:r>
+              <a:rPr sz="1300" b="1">
+                <a:solidFill>
+                  <a:srgbClr val="27AE60"/>
+                </a:solidFill>
+                <a:latin typeface="Yu Gothic UI"/>
+              </a:rPr>
+              <a:t>✓ 業界で一般的な概念</a:t>
+            </a:r>
+          </a:p>
+        </p:txBody>
+      </p:sp>
+      <p:sp>
+        <p:nvSpPr>
+          <p:cNvPr id="6" name="TextBox 5"/>
+          <p:cNvSpPr txBox="1"/>
+          <p:nvPr/>
+        </p:nvSpPr>
+        <p:spPr>
+          <a:xfrm>
+            <a:off x="365760" y="2834640"/>
+            <a:ext cx="5577840" cy="3200400"/>
+          </a:xfrm>
+          <a:prstGeom prst="rect">
+            <a:avLst/>
+          </a:prstGeom>
+          <a:solidFill>
+            <a:srgbClr val="F4F6F8"/>
+          </a:solidFill>
+          <a:ln>
+            <a:solidFill>
+              <a:srgbClr val="F4F6F8"/>
+            </a:solidFill>
+          </a:ln>
+        </p:spPr>
+        <p:txBody>
+          <a:bodyPr wrap="square" anchor="t">
+            <a:spAutoFit/>
+          </a:bodyPr>
+          <a:lstStyle/>
+          <a:p>
+            <a:pPr algn="l"/>
+            <a:r>
+              <a:rPr sz="1100" b="0">
+                <a:solidFill>
+                  <a:srgbClr val="212529"/>
+                </a:solidFill>
+                <a:latin typeface="Yu Gothic UI"/>
+              </a:rPr>
+              <a:t>・CLAUDE.md / .cursorrules 等のルール定義</a:t>
+            </a:r>
+          </a:p>
+          <a:p>
+            <a:pPr algn="l"/>
+            <a:r>
+              <a:rPr sz="1100" b="0">
+                <a:solidFill>
+                  <a:srgbClr val="212529"/>
+                </a:solidFill>
+                <a:latin typeface="Yu Gothic UI"/>
+              </a:rPr>
+              <a:t>・Skills / Custom Instructions 等の手順注入</a:t>
+            </a:r>
+          </a:p>
+          <a:p>
+            <a:pPr algn="l"/>
+            <a:r>
+              <a:rPr sz="1100" b="0">
+                <a:solidFill>
+                  <a:srgbClr val="212529"/>
+                </a:solidFill>
+                <a:latin typeface="Yu Gothic UI"/>
+              </a:rPr>
+              <a:t>・Hooks 等の自動化機構</a:t>
+            </a:r>
+          </a:p>
+          <a:p>
+            <a:pPr algn="l"/>
+            <a:r>
+              <a:rPr sz="1100" b="0">
+                <a:solidFill>
+                  <a:srgbClr val="212529"/>
+                </a:solidFill>
+                <a:latin typeface="Yu Gothic UI"/>
+              </a:rPr>
+              <a:t>・Subagent 等の並列実行</a:t>
+            </a:r>
+          </a:p>
+          <a:p>
+            <a:pPr algn="l"/>
+            <a:endParaRPr sz="1100" b="0">
+              <a:solidFill>
+                <a:srgbClr val="212529"/>
+              </a:solidFill>
+              <a:latin typeface="Yu Gothic UI"/>
+            </a:endParaRPr>
+          </a:p>
+          <a:p>
+            <a:pPr algn="l"/>
+            <a:r>
+              <a:rPr sz="1100" b="0">
+                <a:solidFill>
+                  <a:srgbClr val="212529"/>
+                </a:solidFill>
+                <a:latin typeface="Yu Gothic UI"/>
+              </a:rPr>
+              <a:t>→ これらは多くのエージェントで類似機能あり</a:t>
+            </a:r>
+          </a:p>
+          <a:p>
+            <a:pPr algn="l"/>
+            <a:r>
+              <a:rPr sz="1100" b="0">
+                <a:solidFill>
+                  <a:srgbClr val="212529"/>
+                </a:solidFill>
+                <a:latin typeface="Yu Gothic UI"/>
+              </a:rPr>
+              <a:t>→ ただし「Level 1-5」という段階ラベルは業界標準ではない</a:t>
+            </a:r>
+          </a:p>
+        </p:txBody>
+      </p:sp>
+      <p:sp>
+        <p:nvSpPr>
+          <p:cNvPr id="7" name="TextBox 6"/>
+          <p:cNvSpPr txBox="1"/>
+          <p:nvPr/>
+        </p:nvSpPr>
+        <p:spPr>
+          <a:xfrm>
+            <a:off x="6217920" y="2468880"/>
+            <a:ext cx="5577840" cy="365760"/>
+          </a:xfrm>
+          <a:prstGeom prst="rect">
+            <a:avLst/>
+          </a:prstGeom>
+          <a:noFill/>
+          <a:ln>
+            <a:noFill/>
+          </a:ln>
+        </p:spPr>
+        <p:txBody>
+          <a:bodyPr wrap="square" anchor="t">
+            <a:spAutoFit/>
+          </a:bodyPr>
+          <a:lstStyle/>
+          <a:p>
+            <a:pPr algn="l"/>
+            <a:r>
+              <a:rPr sz="1300" b="1">
+                <a:solidFill>
+                  <a:srgbClr val="C0392B"/>
+                </a:solidFill>
+                <a:latin typeface="Yu Gothic UI"/>
+              </a:rPr>
+              <a:t>✗ 本資料独自の整理</a:t>
+            </a:r>
+          </a:p>
+        </p:txBody>
+      </p:sp>
+      <p:sp>
+        <p:nvSpPr>
+          <p:cNvPr id="8" name="TextBox 7"/>
+          <p:cNvSpPr txBox="1"/>
+          <p:nvPr/>
+        </p:nvSpPr>
+        <p:spPr>
+          <a:xfrm>
+            <a:off x="6217920" y="2834640"/>
+            <a:ext cx="5577840" cy="3200400"/>
+          </a:xfrm>
+          <a:prstGeom prst="rect">
+            <a:avLst/>
+          </a:prstGeom>
+          <a:solidFill>
+            <a:srgbClr val="F4F6F8"/>
+          </a:solidFill>
+          <a:ln>
+            <a:solidFill>
+              <a:srgbClr val="F4F6F8"/>
+            </a:solidFill>
+          </a:ln>
+        </p:spPr>
+        <p:txBody>
+          <a:bodyPr wrap="square" anchor="t">
+            <a:spAutoFit/>
+          </a:bodyPr>
+          <a:lstStyle/>
+          <a:p>
+            <a:pPr algn="l"/>
+            <a:r>
+              <a:rPr sz="1100" b="0">
+                <a:solidFill>
+                  <a:srgbClr val="212529"/>
+                </a:solidFill>
+                <a:latin typeface="Yu Gothic UI"/>
+              </a:rPr>
+              <a:t>・「Level 1-5」という段階ラベル</a:t>
+            </a:r>
+          </a:p>
+          <a:p>
+            <a:pPr algn="l"/>
+            <a:r>
+              <a:rPr sz="1100" b="0">
+                <a:solidFill>
+                  <a:srgbClr val="212529"/>
+                </a:solidFill>
+                <a:latin typeface="Yu Gothic UI"/>
+              </a:rPr>
+              <a:t>・各レベルに対応する機能の割り当て</a:t>
+            </a:r>
+          </a:p>
+          <a:p>
+            <a:pPr algn="l"/>
+            <a:r>
+              <a:rPr sz="1100" b="0">
+                <a:solidFill>
+                  <a:srgbClr val="212529"/>
+                </a:solidFill>
+                <a:latin typeface="Yu Gothic UI"/>
+              </a:rPr>
+              <a:t>・「レベルを上げる」という段階導入モデル</a:t>
+            </a:r>
+          </a:p>
+          <a:p>
+            <a:pPr algn="l"/>
+            <a:endParaRPr sz="1100" b="0">
+              <a:solidFill>
+                <a:srgbClr val="212529"/>
+              </a:solidFill>
+              <a:latin typeface="Yu Gothic UI"/>
+            </a:endParaRPr>
+          </a:p>
+          <a:p>
+            <a:pPr algn="l"/>
+            <a:r>
+              <a:rPr sz="1100" b="0">
+                <a:solidFill>
+                  <a:srgbClr val="212529"/>
+                </a:solidFill>
+                <a:latin typeface="Yu Gothic UI"/>
+              </a:rPr>
+              <a:t>→ 元プロジェクト (GrowthEngine) の運用チームが</a:t>
+            </a:r>
+          </a:p>
+          <a:p>
+            <a:pPr algn="l"/>
+            <a:r>
+              <a:rPr sz="1100" b="0">
+                <a:solidFill>
+                  <a:srgbClr val="212529"/>
+                </a:solidFill>
+                <a:latin typeface="Yu Gothic UI"/>
+              </a:rPr>
+              <a:t>  段階的導入のために独自定義</a:t>
+            </a:r>
+          </a:p>
+          <a:p>
+            <a:pPr algn="l"/>
+            <a:r>
+              <a:rPr sz="1100" b="0">
+                <a:solidFill>
+                  <a:srgbClr val="212529"/>
+                </a:solidFill>
+                <a:latin typeface="Yu Gothic UI"/>
+              </a:rPr>
+              <a:t>→ 社内用語として使う分には問題ないが、</a:t>
+            </a:r>
+          </a:p>
+          <a:p>
+            <a:pPr algn="l"/>
+            <a:r>
+              <a:rPr sz="1100" b="0">
+                <a:solidFill>
+                  <a:srgbClr val="212529"/>
+                </a:solidFill>
+                <a:latin typeface="Yu Gothic UI"/>
+              </a:rPr>
+              <a:t>  社外と議論する際は注釈が必要</a:t>
+            </a:r>
+          </a:p>
+        </p:txBody>
+      </p:sp>
+      <p:sp>
+        <p:nvSpPr>
+          <p:cNvPr id="9" name="TextBox 8"/>
+          <p:cNvSpPr txBox="1"/>
+          <p:nvPr/>
+        </p:nvSpPr>
+        <p:spPr>
+          <a:xfrm>
+            <a:off x="365760" y="6400800"/>
+            <a:ext cx="11430000" cy="274320"/>
+          </a:xfrm>
+          <a:prstGeom prst="rect">
+            <a:avLst/>
+          </a:prstGeom>
+          <a:noFill/>
+          <a:ln>
+            <a:noFill/>
+          </a:ln>
+        </p:spPr>
+        <p:txBody>
+          <a:bodyPr wrap="square" anchor="t">
+            <a:spAutoFit/>
+          </a:bodyPr>
+          <a:lstStyle/>
+          <a:p>
+            <a:pPr algn="l"/>
+            <a:r>
+              <a:rPr sz="900" b="0">
+                <a:solidFill>
+                  <a:srgbClr val="6C757D"/>
+                </a:solidFill>
+                <a:latin typeface="Yu Gothic UI"/>
+              </a:rPr>
+              <a:t>AIタスクフォース 成果報告  |  Claude Code 成熟度レベル比較  |  p.17</a:t>
+            </a:r>
+          </a:p>
+        </p:txBody>
+      </p:sp>
+    </p:spTree>
+  </p:cSld>
+  <p:clrMapOvr>
+    <a:masterClrMapping/>
+  </p:clrMapOvr>
+</p:sld>
+</file>
+
+<file path=ppt/slides/slide16.xml><?xml version="1.0" encoding="utf-8"?>
+<p:sld xmlns:a="http://schemas.openxmlformats.org/drawingml/2006/main" xmlns:r="http://schemas.openxmlformats.org/officeDocument/2006/relationships" xmlns:p="http://schemas.openxmlformats.org/presentationml/2006/main">
+  <p:cSld>
+    <p:spTree>
+      <p:nvGrpSpPr>
+        <p:cNvPr id="1" name=""/>
+        <p:cNvGrpSpPr/>
+        <p:nvPr/>
+      </p:nvGrpSpPr>
+      <p:grpSpPr>
+        <a:xfrm>
+          <a:off x="0" y="0"/>
+          <a:ext cx="0" cy="0"/>
+          <a:chOff x="0" y="0"/>
+          <a:chExt cx="0" cy="0"/>
+        </a:xfrm>
+      </p:grpSpPr>
+      <p:sp>
+        <p:nvSpPr>
+          <p:cNvPr id="2" name="TextBox 1"/>
+          <p:cNvSpPr txBox="1"/>
+          <p:nvPr/>
+        </p:nvSpPr>
+        <p:spPr>
+          <a:xfrm>
+            <a:off x="365760" y="274320"/>
+            <a:ext cx="11430000" cy="640080"/>
+          </a:xfrm>
+          <a:prstGeom prst="rect">
+            <a:avLst/>
+          </a:prstGeom>
+          <a:noFill/>
+          <a:ln>
+            <a:noFill/>
+          </a:ln>
+        </p:spPr>
+        <p:txBody>
+          <a:bodyPr wrap="square" anchor="t">
+            <a:spAutoFit/>
+          </a:bodyPr>
+          <a:lstStyle/>
+          <a:p>
+            <a:pPr algn="l"/>
+            <a:r>
+              <a:rPr sz="2600" b="1">
+                <a:solidFill>
+                  <a:srgbClr val="1F3A5F"/>
+                </a:solidFill>
+                <a:latin typeface="Yu Gothic UI"/>
+              </a:rPr>
+              <a:t>補足⑤: 前提知識のまとめ</a:t>
+            </a:r>
+          </a:p>
+        </p:txBody>
+      </p:sp>
+      <p:sp>
+        <p:nvSpPr>
+          <p:cNvPr id="3" name="TextBox 2"/>
+          <p:cNvSpPr txBox="1"/>
+          <p:nvPr/>
+        </p:nvSpPr>
+        <p:spPr>
+          <a:xfrm>
+            <a:off x="365760" y="914400"/>
+            <a:ext cx="11430000" cy="365760"/>
+          </a:xfrm>
+          <a:prstGeom prst="rect">
+            <a:avLst/>
+          </a:prstGeom>
+          <a:noFill/>
+          <a:ln>
+            <a:noFill/>
+          </a:ln>
+        </p:spPr>
+        <p:txBody>
+          <a:bodyPr wrap="square" anchor="t">
+            <a:spAutoFit/>
+          </a:bodyPr>
+          <a:lstStyle/>
+          <a:p>
+            <a:pPr algn="l"/>
+            <a:r>
+              <a:rPr sz="1400" b="0">
+                <a:solidFill>
+                  <a:srgbClr val="6C757D"/>
+                </a:solidFill>
+                <a:latin typeface="Yu Gothic UI"/>
+              </a:rPr>
+              <a:t>本資料を正しく理解するための3つのポイント</a:t>
+            </a:r>
+          </a:p>
+        </p:txBody>
+      </p:sp>
+      <p:sp>
+        <p:nvSpPr>
+          <p:cNvPr id="4" name="Rounded Rectangle 3"/>
+          <p:cNvSpPr/>
+          <p:nvPr/>
+        </p:nvSpPr>
+        <p:spPr>
+          <a:xfrm>
+            <a:off x="365760" y="1554480"/>
+            <a:ext cx="3749039" cy="4114800"/>
+          </a:xfrm>
+          <a:prstGeom prst="roundRect">
+            <a:avLst/>
+          </a:prstGeom>
+          <a:solidFill>
+            <a:srgbClr val="F4F6F8"/>
+          </a:solidFill>
+          <a:ln w="9525">
+            <a:solidFill>
+              <a:srgbClr val="2E86AB"/>
+            </a:solidFill>
+          </a:ln>
+          <a:effectLst/>
+        </p:spPr>
+        <p:style>
+          <a:lnRef idx="1">
+            <a:schemeClr val="accent1"/>
+          </a:lnRef>
+          <a:fillRef idx="3">
+            <a:schemeClr val="accent1"/>
+          </a:fillRef>
+          <a:effectRef idx="2">
+            <a:schemeClr val="accent1"/>
+          </a:effectRef>
+          <a:fontRef idx="minor">
+            <a:schemeClr val="lt1"/>
+          </a:fontRef>
+        </p:style>
+        <p:txBody>
+          <a:bodyPr wrap="square" lIns="137160" tIns="91440" rIns="137160" bIns="91440" rtlCol="0" anchor="ctr"/>
+          <a:lstStyle/>
+          <a:p>
+            <a:pPr algn="l"/>
+            <a:r>
+              <a:rPr sz="1400" b="1">
+                <a:solidFill>
+                  <a:srgbClr val="2E86AB"/>
+                </a:solidFill>
+                <a:latin typeface="Yu Gothic UI"/>
+              </a:rPr>
+              <a:t>① AI エージェントとは</a:t>
+            </a:r>
+          </a:p>
+          <a:p>
+            <a:pPr algn="l"/>
+            <a:r>
+              <a:rPr sz="1100">
+                <a:solidFill>
+                  <a:srgbClr val="212529"/>
+                </a:solidFill>
+                <a:latin typeface="Yu Gothic UI"/>
+              </a:rPr>
+              <a:t>目標を与えると自律的に行動するAI</a:t>
+            </a:r>
+          </a:p>
+          <a:p>
+            <a:pPr algn="l"/>
+            <a:r>
+              <a:rPr sz="1100">
+                <a:solidFill>
+                  <a:srgbClr val="212529"/>
+                </a:solidFill>
+                <a:latin typeface="Yu Gothic UI"/>
+              </a:rPr>
+              <a:t>ChatGPT が「会話」止まりだったのに対し、</a:t>
+            </a:r>
+          </a:p>
+          <a:p>
+            <a:pPr algn="l"/>
+            <a:r>
+              <a:rPr sz="1100">
+                <a:solidFill>
+                  <a:srgbClr val="212529"/>
+                </a:solidFill>
+                <a:latin typeface="Yu Gothic UI"/>
+              </a:rPr>
+              <a:t>ファイル編集・コマンド実行・API呼び出しまで</a:t>
+            </a:r>
+          </a:p>
+          <a:p>
+            <a:pPr algn="l"/>
+            <a:r>
+              <a:rPr sz="1100">
+                <a:solidFill>
+                  <a:srgbClr val="212529"/>
+                </a:solidFill>
+                <a:latin typeface="Yu Gothic UI"/>
+              </a:rPr>
+              <a:t>自律的にこなす次世代のAI。</a:t>
+            </a:r>
+          </a:p>
+        </p:txBody>
+      </p:sp>
+      <p:sp>
+        <p:nvSpPr>
+          <p:cNvPr id="5" name="Rounded Rectangle 4"/>
+          <p:cNvSpPr/>
+          <p:nvPr/>
+        </p:nvSpPr>
+        <p:spPr>
+          <a:xfrm>
+            <a:off x="4251960" y="1554480"/>
+            <a:ext cx="3749039" cy="4114800"/>
+          </a:xfrm>
+          <a:prstGeom prst="roundRect">
+            <a:avLst/>
+          </a:prstGeom>
+          <a:solidFill>
+            <a:srgbClr val="F4F6F8"/>
+          </a:solidFill>
+          <a:ln w="9525">
+            <a:solidFill>
+              <a:srgbClr val="2E86AB"/>
+            </a:solidFill>
+          </a:ln>
+          <a:effectLst/>
+        </p:spPr>
+        <p:style>
+          <a:lnRef idx="1">
+            <a:schemeClr val="accent1"/>
+          </a:lnRef>
+          <a:fillRef idx="3">
+            <a:schemeClr val="accent1"/>
+          </a:fillRef>
+          <a:effectRef idx="2">
+            <a:schemeClr val="accent1"/>
+          </a:effectRef>
+          <a:fontRef idx="minor">
+            <a:schemeClr val="lt1"/>
+          </a:fontRef>
+        </p:style>
+        <p:txBody>
+          <a:bodyPr wrap="square" lIns="137160" tIns="91440" rIns="137160" bIns="91440" rtlCol="0" anchor="ctr"/>
+          <a:lstStyle/>
+          <a:p>
+            <a:pPr algn="l"/>
+            <a:r>
+              <a:rPr sz="1400" b="1">
+                <a:solidFill>
+                  <a:srgbClr val="2E86AB"/>
+                </a:solidFill>
+                <a:latin typeface="Yu Gothic UI"/>
+              </a:rPr>
+              <a:t>② Claude Code の立ち位置</a:t>
+            </a:r>
+          </a:p>
+          <a:p>
+            <a:pPr algn="l"/>
+            <a:r>
+              <a:rPr sz="1100">
+                <a:solidFill>
+                  <a:srgbClr val="212529"/>
+                </a:solidFill>
+                <a:latin typeface="Yu Gothic UI"/>
+              </a:rPr>
+              <a:t>主要コーディングエージェントの中で</a:t>
+            </a:r>
+          </a:p>
+          <a:p>
+            <a:pPr algn="l"/>
+            <a:r>
+              <a:rPr sz="1100">
+                <a:solidFill>
+                  <a:srgbClr val="212529"/>
+                </a:solidFill>
+                <a:latin typeface="Yu Gothic UI"/>
+              </a:rPr>
+              <a:t>Hooks + Subagents の両方を持つのは</a:t>
+            </a:r>
+          </a:p>
+          <a:p>
+            <a:pPr algn="l"/>
+            <a:r>
+              <a:rPr sz="1100">
+                <a:solidFill>
+                  <a:srgbClr val="212529"/>
+                </a:solidFill>
+                <a:latin typeface="Yu Gothic UI"/>
+              </a:rPr>
+              <a:t>現時点で Claude Code のみ。</a:t>
+            </a:r>
+          </a:p>
+          <a:p>
+            <a:pPr algn="l"/>
+            <a:r>
+              <a:rPr sz="1100">
+                <a:solidFill>
+                  <a:srgbClr val="212529"/>
+                </a:solidFill>
+                <a:latin typeface="Yu Gothic UI"/>
+              </a:rPr>
+              <a:t>自動化と並列レビューで業界最先端。</a:t>
+            </a:r>
+          </a:p>
+        </p:txBody>
+      </p:sp>
+      <p:sp>
+        <p:nvSpPr>
+          <p:cNvPr id="6" name="Rounded Rectangle 5"/>
+          <p:cNvSpPr/>
+          <p:nvPr/>
+        </p:nvSpPr>
+        <p:spPr>
+          <a:xfrm>
+            <a:off x="8138160" y="1554480"/>
+            <a:ext cx="3749039" cy="4114800"/>
+          </a:xfrm>
+          <a:prstGeom prst="roundRect">
+            <a:avLst/>
+          </a:prstGeom>
+          <a:solidFill>
+            <a:srgbClr val="F4F6F8"/>
+          </a:solidFill>
+          <a:ln w="9525">
+            <a:solidFill>
+              <a:srgbClr val="2E86AB"/>
+            </a:solidFill>
+          </a:ln>
+          <a:effectLst/>
+        </p:spPr>
+        <p:style>
+          <a:lnRef idx="1">
+            <a:schemeClr val="accent1"/>
+          </a:lnRef>
+          <a:fillRef idx="3">
+            <a:schemeClr val="accent1"/>
+          </a:fillRef>
+          <a:effectRef idx="2">
+            <a:schemeClr val="accent1"/>
+          </a:effectRef>
+          <a:fontRef idx="minor">
+            <a:schemeClr val="lt1"/>
+          </a:fontRef>
+        </p:style>
+        <p:txBody>
+          <a:bodyPr wrap="square" lIns="137160" tIns="91440" rIns="137160" bIns="91440" rtlCol="0" anchor="ctr"/>
+          <a:lstStyle/>
+          <a:p>
+            <a:pPr algn="l"/>
+            <a:r>
+              <a:rPr sz="1400" b="1">
+                <a:solidFill>
+                  <a:srgbClr val="2E86AB"/>
+                </a:solidFill>
+                <a:latin typeface="Yu Gothic UI"/>
+              </a:rPr>
+              <a:t>③ 「成熟度レベル」の扱い</a:t>
+            </a:r>
+          </a:p>
+          <a:p>
+            <a:pPr algn="l"/>
+            <a:r>
+              <a:rPr sz="1100">
+                <a:solidFill>
+                  <a:srgbClr val="212529"/>
+                </a:solidFill>
+                <a:latin typeface="Yu Gothic UI"/>
+              </a:rPr>
+              <a:t>本資料の Level 1〜5 は本プロジェクト</a:t>
+            </a:r>
+          </a:p>
+          <a:p>
+            <a:pPr algn="l"/>
+            <a:r>
+              <a:rPr sz="1100">
+                <a:solidFill>
+                  <a:srgbClr val="212529"/>
+                </a:solidFill>
+                <a:latin typeface="Yu Gothic UI"/>
+              </a:rPr>
+              <a:t>独自の段階導入フレームワーク。</a:t>
+            </a:r>
+          </a:p>
+          <a:p>
+            <a:pPr algn="l"/>
+            <a:r>
+              <a:rPr sz="1100">
+                <a:solidFill>
+                  <a:srgbClr val="212529"/>
+                </a:solidFill>
+                <a:latin typeface="Yu Gothic UI"/>
+              </a:rPr>
+              <a:t>Anthropic 公式用語ではないが、</a:t>
+            </a:r>
+          </a:p>
+          <a:p>
+            <a:pPr algn="l"/>
+            <a:r>
+              <a:rPr sz="1100">
+                <a:solidFill>
+                  <a:srgbClr val="212529"/>
+                </a:solidFill>
+                <a:latin typeface="Yu Gothic UI"/>
+              </a:rPr>
+              <a:t>実用的で段階導入に適している。</a:t>
+            </a:r>
+          </a:p>
+        </p:txBody>
+      </p:sp>
+      <p:sp>
+        <p:nvSpPr>
+          <p:cNvPr id="7" name="TextBox 6"/>
+          <p:cNvSpPr txBox="1"/>
+          <p:nvPr/>
+        </p:nvSpPr>
+        <p:spPr>
+          <a:xfrm>
+            <a:off x="365760" y="5760720"/>
+            <a:ext cx="11430000" cy="548640"/>
+          </a:xfrm>
+          <a:prstGeom prst="rect">
+            <a:avLst/>
+          </a:prstGeom>
+          <a:noFill/>
+          <a:ln>
+            <a:noFill/>
+          </a:ln>
+        </p:spPr>
+        <p:txBody>
+          <a:bodyPr wrap="square" anchor="t">
+            <a:spAutoFit/>
+          </a:bodyPr>
+          <a:lstStyle/>
+          <a:p>
+            <a:pPr algn="ctr"/>
+            <a:r>
+              <a:rPr sz="1300" b="0">
+                <a:solidFill>
+                  <a:srgbClr val="212529"/>
+                </a:solidFill>
+                <a:latin typeface="Yu Gothic UI"/>
+              </a:rPr>
+              <a:t>本資料の Level 1〜5 は実用的な社内フレームワークとして活用し、</a:t>
+            </a:r>
+          </a:p>
+        </p:txBody>
+      </p:sp>
+      <p:sp>
+        <p:nvSpPr>
+          <p:cNvPr id="8" name="TextBox 7"/>
+          <p:cNvSpPr txBox="1"/>
+          <p:nvPr/>
+        </p:nvSpPr>
+        <p:spPr>
+          <a:xfrm>
+            <a:off x="365760" y="6080760"/>
+            <a:ext cx="11430000" cy="365760"/>
+          </a:xfrm>
+          <a:prstGeom prst="rect">
+            <a:avLst/>
+          </a:prstGeom>
+          <a:noFill/>
+          <a:ln>
+            <a:noFill/>
+          </a:ln>
+        </p:spPr>
+        <p:txBody>
+          <a:bodyPr wrap="square" anchor="t">
+            <a:spAutoFit/>
+          </a:bodyPr>
+          <a:lstStyle/>
+          <a:p>
+            <a:pPr algn="ctr"/>
+            <a:r>
+              <a:rPr sz="1300" b="1">
+                <a:solidFill>
+                  <a:srgbClr val="1F3A5F"/>
+                </a:solidFill>
+                <a:latin typeface="Yu Gothic UI"/>
+              </a:rPr>
+              <a:t>業界標準ではない点に留意しながら、他プロジェクトへの段階的展開を進める</a:t>
+            </a:r>
+          </a:p>
+        </p:txBody>
+      </p:sp>
+      <p:sp>
+        <p:nvSpPr>
+          <p:cNvPr id="9" name="TextBox 8"/>
+          <p:cNvSpPr txBox="1"/>
+          <p:nvPr/>
+        </p:nvSpPr>
+        <p:spPr>
+          <a:xfrm>
+            <a:off x="365760" y="6400800"/>
+            <a:ext cx="11430000" cy="274320"/>
+          </a:xfrm>
+          <a:prstGeom prst="rect">
+            <a:avLst/>
+          </a:prstGeom>
+          <a:noFill/>
+          <a:ln>
+            <a:noFill/>
+          </a:ln>
+        </p:spPr>
+        <p:txBody>
+          <a:bodyPr wrap="square" anchor="t">
+            <a:spAutoFit/>
+          </a:bodyPr>
+          <a:lstStyle/>
+          <a:p>
+            <a:pPr algn="l"/>
+            <a:r>
+              <a:rPr sz="900" b="0">
+                <a:solidFill>
+                  <a:srgbClr val="6C757D"/>
+                </a:solidFill>
+                <a:latin typeface="Yu Gothic UI"/>
+              </a:rPr>
+              <a:t>AIタスクフォース 成果報告  |  Claude Code 成熟度レベル比較  |  p.18</a:t>
+            </a:r>
+          </a:p>
+        </p:txBody>
+      </p:sp>
+    </p:spTree>
+  </p:cSld>
+  <p:clrMapOvr>
+    <a:masterClrMapping/>
+  </p:clrMapOvr>
+</p:sld>
+</file>
+
+<file path=ppt/slides/slide17.xml><?xml version="1.0" encoding="utf-8"?>
+<p:sld xmlns:a="http://schemas.openxmlformats.org/drawingml/2006/main" xmlns:r="http://schemas.openxmlformats.org/officeDocument/2006/relationships" xmlns:p="http://schemas.openxmlformats.org/presentationml/2006/main">
+  <p:cSld>
+    <p:spTree>
+      <p:nvGrpSpPr>
+        <p:cNvPr id="1" name=""/>
+        <p:cNvGrpSpPr/>
+        <p:nvPr/>
+      </p:nvGrpSpPr>
+      <p:grpSpPr>
+        <a:xfrm>
+          <a:off x="0" y="0"/>
+          <a:ext cx="0" cy="0"/>
+          <a:chOff x="0" y="0"/>
+          <a:chExt cx="0" cy="0"/>
+        </a:xfrm>
+      </p:grpSpPr>
+      <p:sp>
+        <p:nvSpPr>
           <p:cNvPr id="2" name="正方形/長方形 1">
             <a:extLst>
               <a:ext uri="{FF2B5EF4-FFF2-40B4-BE49-F238E27FC236}">
@@ -5357,7 +8101,7 @@
         </p:nvSpPr>
         <p:spPr>
           <a:xfrm>
-            <a:off x="0" y="0"/>
+            <a:off x="-52754" y="25400"/>
             <a:ext cx="12192000" cy="6858000"/>
           </a:xfrm>
           <a:prstGeom prst="rect">
@@ -5566,7 +8310,27 @@
                 <a:latin typeface="Yu Gothic"/>
                 <a:ea typeface="Yu Gothic"/>
               </a:rPr>
-              <a:t>AIタスクフォース 成果報告 | 2026年4月8日</a:t>
+              <a:t>AIタスクフォース 成果報告 | 2026年4月</a:t>
+            </a:r>
+            <a:r>
+              <a:rPr lang="en-US" altLang="ja-JP" sz="1400" dirty="0">
+                <a:solidFill>
+                  <a:srgbClr val="778899"/>
+                </a:solidFill>
+                <a:latin typeface="Yu Gothic"/>
+                <a:ea typeface="Yu Gothic"/>
+              </a:rPr>
+              <a:t>15</a:t>
+            </a:r>
+            <a:r>
+              <a:rPr lang="ja-JP" sz="1400" dirty="0">
+                <a:solidFill>
+                  <a:srgbClr val="778899"/>
+                </a:solidFill>
+                <a:latin typeface="Yu Gothic"/>
+                <a:ea typeface="Yu Gothic"/>
+              </a:rPr>
+              <a:t>日</a:t>
             </a:r>
           </a:p>
         </p:txBody>
